--- a/lecons/F3/08_FORM4_LESSON05_Rotation_of_the_Earth.pptx
+++ b/lecons/F3/08_FORM4_LESSON05_Rotation_of_the_Earth.pptx
@@ -49,9 +49,12 @@
     <p:sldId id="297" r:id="rId43"/>
     <p:sldId id="298" r:id="rId44"/>
     <p:sldId id="299" r:id="rId45"/>
+    <p:sldId id="300" r:id="rId46"/>
+    <p:sldId id="301" r:id="rId47"/>
+    <p:sldId id="302" r:id="rId48"/>
   </p:sldIdLst>
   <p:notesMasterIdLst>
-    <p:notesMasterId r:id="rId46"/>
+    <p:notesMasterId r:id="rId49"/>
   </p:notesMasterIdLst>
   <p:sldSz cx="12192000" cy="6858000"/>
   <p:notesSz cx="6858000" cy="12192000"/>
@@ -721,7 +724,7 @@
           <a:p>
             <a:r>
               <a:rPr lang="en-US" dirty="0"/>
-              <a:t>Good. The sister thinks that the Sun moves around the Earth every day.</a:t>
+              <a:t>Good. The sister does not know what really causes day and night.</a:t>
             </a:r>
             <a:endParaRPr lang="en-US" dirty="0"/>
           </a:p>
@@ -1601,7 +1604,7 @@
           <a:p>
             <a:r>
               <a:rPr lang="en-US" dirty="0"/>
-              <a:t>Let us check the answer together. The Earth turns. Garoua faces the Sun (day), then turns away (night).</a:t>
+              <a:t>Let us check the answer together. The Earth turns: Garoua faces the Sun (day), then turns away from it (night).</a:t>
             </a:r>
             <a:endParaRPr lang="en-US" dirty="0"/>
           </a:p>
@@ -1953,7 +1956,7 @@
           <a:p>
             <a:r>
               <a:rPr lang="en-US" dirty="0"/>
-              <a:t>Activity 3. Look carefully at this picture: a storm seen from space. Observe every detail before I ask the question.</a:t>
+              <a:t>Activity 3. Look carefully at this animation: animation: winds are bent by the rotation of the Earth. Watch the animation to the end; it will play again.</a:t>
             </a:r>
             <a:endParaRPr lang="en-US" dirty="0"/>
           </a:p>
@@ -2041,7 +2044,7 @@
           <a:p>
             <a:r>
               <a:rPr lang="en-US" dirty="0"/>
-              <a:t>Here is the question for Activity 3: The winds of this storm turn in a circle. Which movement of the Earth makes them turn? Take one minute to think and write your answer in your rough notebook.</a:t>
+              <a:t>Here is the question for Activity 3: In which direction are winds bent in the Northern Hemisphere? Take one minute to think and write your answer in your rough notebook.</a:t>
             </a:r>
             <a:endParaRPr lang="en-US" dirty="0"/>
           </a:p>
@@ -2129,7 +2132,7 @@
           <a:p>
             <a:r>
               <a:rPr lang="en-US" dirty="0"/>
-              <a:t>Let us check the answer together. The rotation of the Earth.</a:t>
+              <a:t>Let us check the answer together. To the right.</a:t>
             </a:r>
             <a:endParaRPr lang="en-US" dirty="0"/>
           </a:p>
@@ -2305,7 +2308,7 @@
           <a:p>
             <a:r>
               <a:rPr lang="en-US" dirty="0"/>
-              <a:t>Let us copy Meaning of Rotation. The rotation of the Earth is explained as follows. On this slide we have Rotation and Axis. Write each point on a new line, with the key term first, and explain it in your own words when we revise. When you finish, we go to the next slide.</a:t>
+              <a:t>Let us copy the definitions. The key terms of this lesson are defined as follows. On this slide we have Rotation and Axis. Write each point on a new line, with the key term first, and explain it in your own words when we revise.</a:t>
             </a:r>
             <a:endParaRPr lang="en-US" dirty="0"/>
           </a:p>
@@ -2393,7 +2396,7 @@
           <a:p>
             <a:r>
               <a:rPr lang="en-US" dirty="0"/>
-              <a:t>We continue with Meaning of Rotation. On this slide we have Direction and time. Write each point on a new line, with the key term first, and explain it in your own words when we revise.</a:t>
+              <a:t>Let us copy Meaning and Illustration of Rotation. The rotation of the Earth is described as follows. Copy the point on Direction on the left, then draw the diagram on the right: the rotation of the Earth. Give it a title and label it clearly.</a:t>
             </a:r>
             <a:endParaRPr lang="en-US" dirty="0"/>
           </a:p>
@@ -2569,7 +2572,7 @@
           <a:p>
             <a:r>
               <a:rPr lang="en-US" dirty="0"/>
-              <a:t>Now draw this illustration in your notebook: the rotation of the Earth. Give it a title and label it clearly.</a:t>
+              <a:t>We continue with Meaning and Illustration of Rotation. On this slide we have Duration, Tilt of the axis and Speed. Write each point on a new line, with the key term first, and explain it in your own words when we revise.</a:t>
             </a:r>
             <a:endParaRPr lang="en-US" dirty="0"/>
           </a:p>
@@ -2657,7 +2660,7 @@
           <a:p>
             <a:r>
               <a:rPr lang="en-US" dirty="0"/>
-              <a:t>Let us copy Effects of Rotation. The rotation of the Earth has the following effects. On this slide we have Day and night and Sunrise in the east. Write each point on a new line, with the key term first, and explain it in your own words when we revise. When you finish, we go to the next slide.</a:t>
+              <a:t>Let us copy Effects of Rotation. The rotation of the Earth has the following effects. Copy the point on Day and night on the left, then draw the diagram on the right: day and night. Give it a title and label it clearly.</a:t>
             </a:r>
             <a:endParaRPr lang="en-US" dirty="0"/>
           </a:p>
@@ -2745,7 +2748,7 @@
           <a:p>
             <a:r>
               <a:rPr lang="en-US" dirty="0"/>
-              <a:t>We continue with Effects of Rotation. On this slide we have Time difference, Deflection of winds and Tides. Write each point on a new line, with the key term first, and explain it in your own words when we revise.</a:t>
+              <a:t>Copy the point on Sunrise in the east on the left, then draw the diagram on the right: the Sun low over the savanna. Give it a title and label it clearly.</a:t>
             </a:r>
             <a:endParaRPr lang="en-US" dirty="0"/>
           </a:p>
@@ -2833,7 +2836,7 @@
           <a:p>
             <a:r>
               <a:rPr lang="en-US" dirty="0"/>
-              <a:t>Now let us check what you have understood. Question 1: What is rotation? Answer in your exercise book.</a:t>
+              <a:t>We continue with Effects of Rotation. On this slide we have Difference in time. Write each point on a new line, with the key term first, and explain it in your own words when we revise.</a:t>
             </a:r>
             <a:endParaRPr lang="en-US" dirty="0"/>
           </a:p>
@@ -2921,7 +2924,7 @@
           <a:p>
             <a:r>
               <a:rPr lang="en-US" dirty="0"/>
-              <a:t>The expected answer is: the turning of the Earth on its axis. If you got it right, well done.</a:t>
+              <a:t>Copy the point on Deflection of winds and currents on the left, then draw the diagram on the right: deflection of winds. Give it a title and label it clearly.</a:t>
             </a:r>
             <a:endParaRPr lang="en-US" dirty="0"/>
           </a:p>
@@ -3009,7 +3012,7 @@
           <a:p>
             <a:r>
               <a:rPr lang="en-US" dirty="0"/>
-              <a:t>Now let us check what you have understood. Question 2: Give two effects of rotation. Answer in your exercise book.</a:t>
+              <a:t>We continue with Effects of Rotation. On this slide we have Tides. Write each point on a new line, with the key term first, and explain it in your own words when we revise.</a:t>
             </a:r>
             <a:endParaRPr lang="en-US" dirty="0"/>
           </a:p>
@@ -3097,7 +3100,7 @@
           <a:p>
             <a:r>
               <a:rPr lang="en-US" dirty="0"/>
-              <a:t>The expected answer is: day and night; the Sun seems to rise in the east. If you got it right, well done.</a:t>
+              <a:t>Now let us check what you have understood. Question 1: What is rotation? Answer in your exercise book.</a:t>
             </a:r>
             <a:endParaRPr lang="en-US" dirty="0"/>
           </a:p>
@@ -3185,7 +3188,7 @@
           <a:p>
             <a:r>
               <a:rPr lang="en-US" dirty="0"/>
-              <a:t>For those who need more practice, fill in the blanks in your exercise book. The answers are: number 1, axis; number 2, 24; number 3, east.</a:t>
+              <a:t>The expected answer is: the turning of the Earth on its axis. If you got it right, well done.</a:t>
             </a:r>
             <a:endParaRPr lang="en-US" dirty="0"/>
           </a:p>
@@ -3273,7 +3276,7 @@
           <a:p>
             <a:r>
               <a:rPr lang="en-US" dirty="0"/>
-              <a:t>For your homework: Ask an elder in which months the rainy season and the dry season start in Garoua. Write the months down. We shall correct it at the beginning of our next lesson.</a:t>
+              <a:t>Now let us check what you have understood. Question 2: Give two effects of rotation. Answer in your exercise book.</a:t>
             </a:r>
             <a:endParaRPr lang="en-US" dirty="0"/>
           </a:p>
@@ -3361,7 +3364,7 @@
           <a:p>
             <a:r>
               <a:rPr lang="en-US" dirty="0"/>
-              <a:t>Our next lesson will be on Lesson 6: The Revolution of the Earth. Thank you for your attention, and see you next time.</a:t>
+              <a:t>The expected answer is: day and night; the Sun seems to rise in the east. If you got it right, well done.</a:t>
             </a:r>
             <a:endParaRPr lang="en-US" dirty="0"/>
           </a:p>
@@ -3537,7 +3540,7 @@
           <a:p>
             <a:r>
               <a:rPr lang="en-US" dirty="0"/>
-              <a:t>Let us play the bilingual game. I say a word in English, and you give me the French word. Then we do the reverse.</a:t>
+              <a:t>For those who need more practice, fill in the blanks in your exercise book. The answers are: number 1, axis; number 2, 24; number 3, east.</a:t>
             </a:r>
             <a:endParaRPr lang="en-US" dirty="0"/>
           </a:p>
@@ -3625,7 +3628,7 @@
           <a:p>
             <a:r>
               <a:rPr lang="en-US" dirty="0"/>
-              <a:t>I record this information in the official logbook of the class after the lesson.</a:t>
+              <a:t>For your homework: Ask an elder in which months the rainy season and the dry season start in Garoua. Write the months down. We shall correct it at the beginning of our next lesson.</a:t>
             </a:r>
             <a:endParaRPr lang="en-US" dirty="0"/>
           </a:p>
@@ -3713,7 +3716,7 @@
           <a:p>
             <a:r>
               <a:rPr lang="en-US" dirty="0"/>
-              <a:t>I complete the second page of the logbook: the matter taught, the evaluation, the homework and the attendance.</a:t>
+              <a:t>Our next lesson will be on Lesson 6: The Revolution of the Earth. Thank you for your attention, and see you next time.</a:t>
             </a:r>
             <a:endParaRPr lang="en-US" dirty="0"/>
           </a:p>
@@ -3801,7 +3804,7 @@
           <a:p>
             <a:r>
               <a:rPr lang="en-US" dirty="0"/>
-              <a:t>This slide is for me, the teacher: it gives the timing of the lesson and what to do if the projector is not available.</a:t>
+              <a:t>Let us play the bilingual game. I say a word in English, and you give me the French word. Then we do the reverse.</a:t>
             </a:r>
             <a:endParaRPr lang="en-US" dirty="0"/>
           </a:p>
@@ -3889,7 +3892,7 @@
           <a:p>
             <a:r>
               <a:rPr lang="en-US" dirty="0"/>
-              <a:t>These are the references and picture credits used to prepare this lesson.</a:t>
+              <a:t>I record this information in the official logbook of the class after the lesson.</a:t>
             </a:r>
             <a:endParaRPr lang="en-US" dirty="0"/>
           </a:p>
@@ -3913,6 +3916,270 @@
             <a:fld id="{F7021451-1387-4CA6-816F-3879F97B5CBC}" type="slidenum">
               <a:rPr lang="en-US"/>
               <a:t>44</a:t>
+            </a:fld>
+            <a:endParaRPr lang="en-US"/>
+          </a:p>
+        </p:txBody>
+      </p:sp>
+    </p:spTree>
+    <p:extLst>
+      <p:ext uri="{BB962C8B-B14F-4D97-AF65-F5344CB8AC3E}">
+        <p14:creationId xmlns:p14="http://schemas.microsoft.com/office/powerpoint/2010/main" val="1024086991"/>
+      </p:ext>
+    </p:extLst>
+  </p:cSld>
+  <p:clrMapOvr>
+    <a:masterClrMapping/>
+  </p:clrMapOvr>
+</p:notes>
+</file>
+
+<file path=ppt/notesSlides/notesSlide45.xml><?xml version="1.0" encoding="utf-8"?>
+<p:notes xmlns:a="http://schemas.openxmlformats.org/drawingml/2006/main" xmlns:r="http://schemas.openxmlformats.org/officeDocument/2006/relationships" xmlns:p="http://schemas.openxmlformats.org/presentationml/2006/main">
+  <p:cSld>
+    <p:spTree>
+      <p:nvGrpSpPr>
+        <p:cNvPr id="1" name=""/>
+        <p:cNvGrpSpPr/>
+        <p:nvPr/>
+      </p:nvGrpSpPr>
+      <p:grpSpPr>
+        <a:xfrm>
+          <a:off x="0" y="0"/>
+          <a:ext cx="0" cy="0"/>
+          <a:chOff x="0" y="0"/>
+          <a:chExt cx="0" cy="0"/>
+        </a:xfrm>
+      </p:grpSpPr>
+      <p:sp>
+        <p:nvSpPr>
+          <p:cNvPr id="2" name="Slide Image Placeholder 1"/>
+          <p:cNvSpPr>
+            <a:spLocks noGrp="1" noRot="1" noChangeAspect="1"/>
+          </p:cNvSpPr>
+          <p:nvPr>
+            <p:ph type="sldImg"/>
+          </p:nvPr>
+        </p:nvSpPr>
+        <p:spPr/>
+      </p:sp>
+      <p:sp>
+        <p:nvSpPr>
+          <p:cNvPr id="3" name="Notes Placeholder 2"/>
+          <p:cNvSpPr>
+            <a:spLocks noGrp="1"/>
+          </p:cNvSpPr>
+          <p:nvPr>
+            <p:ph type="body" idx="1"/>
+          </p:nvPr>
+        </p:nvSpPr>
+        <p:spPr/>
+        <p:txBody>
+          <a:bodyPr/>
+          <a:lstStyle/>
+          <a:p>
+            <a:r>
+              <a:rPr lang="en-US" dirty="0"/>
+              <a:t>I complete the second page of the logbook: the matter taught, the evaluation, the homework and the attendance.</a:t>
+            </a:r>
+            <a:endParaRPr lang="en-US" dirty="0"/>
+          </a:p>
+        </p:txBody>
+      </p:sp>
+      <p:sp>
+        <p:nvSpPr>
+          <p:cNvPr id="4" name="Slide Number Placeholder 3"/>
+          <p:cNvSpPr>
+            <a:spLocks noGrp="1"/>
+          </p:cNvSpPr>
+          <p:nvPr>
+            <p:ph type="sldNum" sz="quarter" idx="10"/>
+          </p:nvPr>
+        </p:nvSpPr>
+        <p:spPr/>
+        <p:txBody>
+          <a:bodyPr/>
+          <a:lstStyle/>
+          <a:p>
+            <a:fld id="{F7021451-1387-4CA6-816F-3879F97B5CBC}" type="slidenum">
+              <a:rPr lang="en-US"/>
+              <a:t>45</a:t>
+            </a:fld>
+            <a:endParaRPr lang="en-US"/>
+          </a:p>
+        </p:txBody>
+      </p:sp>
+    </p:spTree>
+    <p:extLst>
+      <p:ext uri="{BB962C8B-B14F-4D97-AF65-F5344CB8AC3E}">
+        <p14:creationId xmlns:p14="http://schemas.microsoft.com/office/powerpoint/2010/main" val="1024086991"/>
+      </p:ext>
+    </p:extLst>
+  </p:cSld>
+  <p:clrMapOvr>
+    <a:masterClrMapping/>
+  </p:clrMapOvr>
+</p:notes>
+</file>
+
+<file path=ppt/notesSlides/notesSlide46.xml><?xml version="1.0" encoding="utf-8"?>
+<p:notes xmlns:a="http://schemas.openxmlformats.org/drawingml/2006/main" xmlns:r="http://schemas.openxmlformats.org/officeDocument/2006/relationships" xmlns:p="http://schemas.openxmlformats.org/presentationml/2006/main">
+  <p:cSld>
+    <p:spTree>
+      <p:nvGrpSpPr>
+        <p:cNvPr id="1" name=""/>
+        <p:cNvGrpSpPr/>
+        <p:nvPr/>
+      </p:nvGrpSpPr>
+      <p:grpSpPr>
+        <a:xfrm>
+          <a:off x="0" y="0"/>
+          <a:ext cx="0" cy="0"/>
+          <a:chOff x="0" y="0"/>
+          <a:chExt cx="0" cy="0"/>
+        </a:xfrm>
+      </p:grpSpPr>
+      <p:sp>
+        <p:nvSpPr>
+          <p:cNvPr id="2" name="Slide Image Placeholder 1"/>
+          <p:cNvSpPr>
+            <a:spLocks noGrp="1" noRot="1" noChangeAspect="1"/>
+          </p:cNvSpPr>
+          <p:nvPr>
+            <p:ph type="sldImg"/>
+          </p:nvPr>
+        </p:nvSpPr>
+        <p:spPr/>
+      </p:sp>
+      <p:sp>
+        <p:nvSpPr>
+          <p:cNvPr id="3" name="Notes Placeholder 2"/>
+          <p:cNvSpPr>
+            <a:spLocks noGrp="1"/>
+          </p:cNvSpPr>
+          <p:nvPr>
+            <p:ph type="body" idx="1"/>
+          </p:nvPr>
+        </p:nvSpPr>
+        <p:spPr/>
+        <p:txBody>
+          <a:bodyPr/>
+          <a:lstStyle/>
+          <a:p>
+            <a:r>
+              <a:rPr lang="en-US" dirty="0"/>
+              <a:t>This slide is for me, the teacher: it gives the timing of the lesson and what to do if the projector is not available.</a:t>
+            </a:r>
+            <a:endParaRPr lang="en-US" dirty="0"/>
+          </a:p>
+        </p:txBody>
+      </p:sp>
+      <p:sp>
+        <p:nvSpPr>
+          <p:cNvPr id="4" name="Slide Number Placeholder 3"/>
+          <p:cNvSpPr>
+            <a:spLocks noGrp="1"/>
+          </p:cNvSpPr>
+          <p:nvPr>
+            <p:ph type="sldNum" sz="quarter" idx="10"/>
+          </p:nvPr>
+        </p:nvSpPr>
+        <p:spPr/>
+        <p:txBody>
+          <a:bodyPr/>
+          <a:lstStyle/>
+          <a:p>
+            <a:fld id="{F7021451-1387-4CA6-816F-3879F97B5CBC}" type="slidenum">
+              <a:rPr lang="en-US"/>
+              <a:t>46</a:t>
+            </a:fld>
+            <a:endParaRPr lang="en-US"/>
+          </a:p>
+        </p:txBody>
+      </p:sp>
+    </p:spTree>
+    <p:extLst>
+      <p:ext uri="{BB962C8B-B14F-4D97-AF65-F5344CB8AC3E}">
+        <p14:creationId xmlns:p14="http://schemas.microsoft.com/office/powerpoint/2010/main" val="1024086991"/>
+      </p:ext>
+    </p:extLst>
+  </p:cSld>
+  <p:clrMapOvr>
+    <a:masterClrMapping/>
+  </p:clrMapOvr>
+</p:notes>
+</file>
+
+<file path=ppt/notesSlides/notesSlide47.xml><?xml version="1.0" encoding="utf-8"?>
+<p:notes xmlns:a="http://schemas.openxmlformats.org/drawingml/2006/main" xmlns:r="http://schemas.openxmlformats.org/officeDocument/2006/relationships" xmlns:p="http://schemas.openxmlformats.org/presentationml/2006/main">
+  <p:cSld>
+    <p:spTree>
+      <p:nvGrpSpPr>
+        <p:cNvPr id="1" name=""/>
+        <p:cNvGrpSpPr/>
+        <p:nvPr/>
+      </p:nvGrpSpPr>
+      <p:grpSpPr>
+        <a:xfrm>
+          <a:off x="0" y="0"/>
+          <a:ext cx="0" cy="0"/>
+          <a:chOff x="0" y="0"/>
+          <a:chExt cx="0" cy="0"/>
+        </a:xfrm>
+      </p:grpSpPr>
+      <p:sp>
+        <p:nvSpPr>
+          <p:cNvPr id="2" name="Slide Image Placeholder 1"/>
+          <p:cNvSpPr>
+            <a:spLocks noGrp="1" noRot="1" noChangeAspect="1"/>
+          </p:cNvSpPr>
+          <p:nvPr>
+            <p:ph type="sldImg"/>
+          </p:nvPr>
+        </p:nvSpPr>
+        <p:spPr/>
+      </p:sp>
+      <p:sp>
+        <p:nvSpPr>
+          <p:cNvPr id="3" name="Notes Placeholder 2"/>
+          <p:cNvSpPr>
+            <a:spLocks noGrp="1"/>
+          </p:cNvSpPr>
+          <p:nvPr>
+            <p:ph type="body" idx="1"/>
+          </p:nvPr>
+        </p:nvSpPr>
+        <p:spPr/>
+        <p:txBody>
+          <a:bodyPr/>
+          <a:lstStyle/>
+          <a:p>
+            <a:r>
+              <a:rPr lang="en-US" dirty="0"/>
+              <a:t>These are the references and picture credits used to prepare this lesson.</a:t>
+            </a:r>
+            <a:endParaRPr lang="en-US" dirty="0"/>
+          </a:p>
+        </p:txBody>
+      </p:sp>
+      <p:sp>
+        <p:nvSpPr>
+          <p:cNvPr id="4" name="Slide Number Placeholder 3"/>
+          <p:cNvSpPr>
+            <a:spLocks noGrp="1"/>
+          </p:cNvSpPr>
+          <p:nvPr>
+            <p:ph type="sldNum" sz="quarter" idx="10"/>
+          </p:nvPr>
+        </p:nvSpPr>
+        <p:spPr/>
+        <p:txBody>
+          <a:bodyPr/>
+          <a:lstStyle/>
+          <a:p>
+            <a:fld id="{F7021451-1387-4CA6-816F-3879F97B5CBC}" type="slidenum">
+              <a:rPr lang="en-US"/>
+              <a:t>47</a:t>
             </a:fld>
             <a:endParaRPr lang="en-US"/>
           </a:p>
@@ -4329,7 +4596,7 @@
           <a:p>
             <a:r>
               <a:rPr lang="en-US" dirty="0"/>
-              <a:t>Listen carefully to this situation from real life. Every morning in Garoua, the first light appears in the east. In the evening, the Sun disappears in the west. Oumarou's little sister thinks that the Sun walks around the Earth. Think about it, because I am going to ask you some questions.</a:t>
+              <a:t>Listen carefully to this situation from real life. Every morning in Garoua, the first light appears in the east, and in the evening the Sun disappears in the west. Oumarou's little sister thinks that the Sun walks around the Earth every day. She asks: "What really moves, and why do we have day and night?" Think about it, because I am going to ask you some questions.</a:t>
             </a:r>
             <a:endParaRPr lang="en-US" dirty="0"/>
           </a:p>
@@ -6012,7 +6279,7 @@
                 <a:ea typeface="Times New Roman" pitchFamily="34" charset="-122"/>
                 <a:cs typeface="Times New Roman" pitchFamily="34" charset="-120"/>
               </a:rPr>
-              <a:t>The sister thinks that the Sun moves around the Earth every day.</a:t>
+              <a:t>The sister does not know what really causes day and night.</a:t>
             </a:r>
             <a:endParaRPr lang="en-US" sz="4000" dirty="0"/>
           </a:p>
@@ -8573,7 +8840,7 @@
                 <a:ea typeface="Times New Roman" pitchFamily="34" charset="-122"/>
                 <a:cs typeface="Times New Roman" pitchFamily="34" charset="-120"/>
               </a:rPr>
-              <a:t>The Earth turns. Garoua faces the Sun (day), then turns away (night).</a:t>
+              <a:t>The Earth turns: Garoua faces the Sun (day), then turns away from it (night).</a:t>
             </a:r>
             <a:endParaRPr lang="en-US" sz="4000" dirty="0"/>
           </a:p>
@@ -9384,7 +9651,7 @@
       </p:sp>
       <p:pic>
         <p:nvPicPr>
-          <p:cNvPr id="4" name="Image 0" descr="/home/claude/f4/img/v2/f4_hurricane.jpg">    </p:cNvPr>
+          <p:cNvPr id="4" name="Image 0" descr="/home/claude/f4/img/v2/coriolis.gif">    </p:cNvPr>
           <p:cNvPicPr>
             <a:picLocks noChangeAspect="1"/>
           </p:cNvPicPr>
@@ -9398,8 +9665,8 @@
         </p:blipFill>
         <p:spPr>
           <a:xfrm>
-            <a:off x="2246610" y="1783080"/>
-            <a:ext cx="7698475" cy="4270248"/>
+            <a:off x="629930" y="1783080"/>
+            <a:ext cx="10931835" cy="4270248"/>
           </a:xfrm>
           <a:prstGeom prst="rect">
             <a:avLst/>
@@ -9439,7 +9706,7 @@
                 <a:ea typeface="Times New Roman" pitchFamily="34" charset="-122"/>
                 <a:cs typeface="Times New Roman" pitchFamily="34" charset="-120"/>
               </a:rPr>
-              <a:t>A storm seen from space.</a:t>
+              <a:t>Animation: winds are bent by the rotation of the Earth.</a:t>
             </a:r>
             <a:endParaRPr lang="en-US" sz="1800" dirty="0"/>
           </a:p>
@@ -9658,7 +9925,7 @@
                 <a:ea typeface="Times New Roman" pitchFamily="34" charset="-122"/>
                 <a:cs typeface="Times New Roman" pitchFamily="34" charset="-120"/>
               </a:rPr>
-              <a:t>The winds of this storm turn in a circle. Which movement of the Earth makes them turn?</a:t>
+              <a:t>In which direction are winds bent in the Northern Hemisphere?</a:t>
             </a:r>
             <a:endParaRPr lang="en-US" sz="4000" dirty="0"/>
           </a:p>
@@ -9877,7 +10144,7 @@
                 <a:ea typeface="Times New Roman" pitchFamily="34" charset="-122"/>
                 <a:cs typeface="Times New Roman" pitchFamily="34" charset="-120"/>
               </a:rPr>
-              <a:t>The rotation of the Earth.</a:t>
+              <a:t>To the right.</a:t>
             </a:r>
             <a:endParaRPr lang="en-US" sz="4000" dirty="0"/>
           </a:p>
@@ -10271,7 +10538,7 @@
         <p:spPr>
           <a:xfrm>
             <a:off x="0" y="658368"/>
-            <a:ext cx="3840480" cy="5833872"/>
+            <a:ext cx="2468880" cy="5833872"/>
           </a:xfrm>
           <a:prstGeom prst="rect">
             <a:avLst/>
@@ -10286,8 +10553,8 @@
         </p:nvSpPr>
         <p:spPr>
           <a:xfrm>
-            <a:off x="4069080" y="1005840"/>
-            <a:ext cx="7802575" cy="731520"/>
+            <a:off x="2697480" y="1005840"/>
+            <a:ext cx="9174175" cy="731520"/>
           </a:xfrm>
           <a:prstGeom prst="rect">
             <a:avLst/>
@@ -10313,7 +10580,7 @@
                 <a:ea typeface="Times New Roman" pitchFamily="34" charset="-122"/>
                 <a:cs typeface="Times New Roman" pitchFamily="34" charset="-120"/>
               </a:rPr>
-              <a:t>1. Meaning of Rotation</a:t>
+              <a:t>DEFINITIONS</a:t>
             </a:r>
             <a:endParaRPr lang="en-US" sz="3600" dirty="0"/>
           </a:p>
@@ -10327,8 +10594,8 @@
         </p:nvSpPr>
         <p:spPr>
           <a:xfrm>
-            <a:off x="4069080" y="1783080"/>
-            <a:ext cx="7802575" cy="4663440"/>
+            <a:off x="2697480" y="1783080"/>
+            <a:ext cx="9174175" cy="4663440"/>
           </a:xfrm>
           <a:prstGeom prst="rect">
             <a:avLst/>
@@ -10355,7 +10622,7 @@
                 <a:ea typeface="Times New Roman" pitchFamily="34" charset="-122"/>
                 <a:cs typeface="Times New Roman" pitchFamily="34" charset="-120"/>
               </a:rPr>
-              <a:t>The rotation of the Earth is explained as follows:</a:t>
+              <a:t>The key terms of this lesson are defined as follows:</a:t>
             </a:r>
             <a:endParaRPr lang="en-US" sz="4000" dirty="0"/>
           </a:p>
@@ -10392,7 +10659,7 @@
                 <a:ea typeface="Times New Roman" pitchFamily="34" charset="-122"/>
                 <a:cs typeface="Times New Roman" pitchFamily="34" charset="-120"/>
               </a:rPr>
-              <a:t>It is the turning of the Earth on its axis.</a:t>
+              <a:t>It is the turning of the Earth on its axis from west to east.</a:t>
             </a:r>
             <a:endParaRPr lang="en-US" sz="4000" dirty="0"/>
           </a:p>
@@ -10429,7 +10696,7 @@
                 <a:ea typeface="Times New Roman" pitchFamily="34" charset="-122"/>
                 <a:cs typeface="Times New Roman" pitchFamily="34" charset="-120"/>
               </a:rPr>
-              <a:t>It is the imaginary line from the North Pole to the South Pole, tilted at 23½°.</a:t>
+              <a:t>It is the imaginary line through the centre of the Earth from the North Pole to the South Pole.</a:t>
             </a:r>
             <a:endParaRPr lang="en-US" sz="4000" dirty="0"/>
           </a:p>
@@ -10547,9 +10814,129 @@
           </a:p>
         </p:txBody>
       </p:sp>
+      <p:sp>
+        <p:nvSpPr>
+          <p:cNvPr id="3" name="Text 1"/>
+          <p:cNvSpPr/>
+          <p:nvPr/>
+        </p:nvSpPr>
+        <p:spPr>
+          <a:xfrm>
+            <a:off x="365760" y="1005840"/>
+            <a:ext cx="11460175" cy="731520"/>
+          </a:xfrm>
+          <a:prstGeom prst="rect">
+            <a:avLst/>
+          </a:prstGeom>
+          <a:noFill/>
+          <a:ln/>
+        </p:spPr>
+        <p:txBody>
+          <a:bodyPr wrap="square" lIns="0" tIns="0" rIns="0" bIns="0" rtlCol="0" anchor="ctr">
+            <a:normAutofit/>
+          </a:bodyPr>
+          <a:lstStyle/>
+          <a:p>
+            <a:pPr algn="ctr" indent="0" marL="0">
+              <a:buNone/>
+            </a:pPr>
+            <a:r>
+              <a:rPr lang="en-US" sz="3600" b="1" dirty="0">
+                <a:solidFill>
+                  <a:srgbClr val="990011"/>
+                </a:solidFill>
+                <a:latin typeface="Times New Roman" pitchFamily="34" charset="0"/>
+                <a:ea typeface="Times New Roman" pitchFamily="34" charset="-122"/>
+                <a:cs typeface="Times New Roman" pitchFamily="34" charset="-120"/>
+              </a:rPr>
+              <a:t>1. Meaning and Illustration of Rotation</a:t>
+            </a:r>
+            <a:endParaRPr lang="en-US" sz="3600" dirty="0"/>
+          </a:p>
+        </p:txBody>
+      </p:sp>
+      <p:sp>
+        <p:nvSpPr>
+          <p:cNvPr id="4" name="Text 2"/>
+          <p:cNvSpPr/>
+          <p:nvPr/>
+        </p:nvSpPr>
+        <p:spPr>
+          <a:xfrm>
+            <a:off x="365760" y="1783080"/>
+            <a:ext cx="4846320" cy="4617720"/>
+          </a:xfrm>
+          <a:prstGeom prst="rect">
+            <a:avLst/>
+          </a:prstGeom>
+          <a:noFill/>
+          <a:ln/>
+        </p:spPr>
+        <p:txBody>
+          <a:bodyPr wrap="square" lIns="0" tIns="0" rIns="0" bIns="0" rtlCol="0" anchor="t"/>
+          <a:lstStyle/>
+          <a:p>
+            <a:pPr algn="l" indent="0" marL="0">
+              <a:spcAft>
+                <a:spcPts val="800"/>
+              </a:spcAft>
+              <a:buNone/>
+            </a:pPr>
+            <a:r>
+              <a:rPr lang="en-US" sz="3600" i="1" dirty="0">
+                <a:solidFill>
+                  <a:srgbClr val="111111"/>
+                </a:solidFill>
+                <a:latin typeface="Times New Roman" pitchFamily="34" charset="0"/>
+                <a:ea typeface="Times New Roman" pitchFamily="34" charset="-122"/>
+                <a:cs typeface="Times New Roman" pitchFamily="34" charset="-120"/>
+              </a:rPr>
+              <a:t>The rotation of the Earth is described as follows:</a:t>
+            </a:r>
+            <a:endParaRPr lang="en-US" sz="3600" dirty="0"/>
+          </a:p>
+          <a:p>
+            <a:pPr algn="l" indent="0" marL="0">
+              <a:spcAft>
+                <a:spcPts val="800"/>
+              </a:spcAft>
+              <a:buNone/>
+            </a:pPr>
+            <a:r>
+              <a:rPr lang="en-US" sz="3600" b="1" dirty="0">
+                <a:solidFill>
+                  <a:srgbClr val="111111"/>
+                </a:solidFill>
+                <a:latin typeface="Times New Roman" pitchFamily="34" charset="0"/>
+                <a:ea typeface="Times New Roman" pitchFamily="34" charset="-122"/>
+                <a:cs typeface="Times New Roman" pitchFamily="34" charset="-120"/>
+              </a:rPr>
+              <a:t>Direction: </a:t>
+            </a:r>
+            <a:pPr algn="l" indent="0" marL="0">
+              <a:spcAft>
+                <a:spcPts val="800"/>
+              </a:spcAft>
+              <a:buNone/>
+            </a:pPr>
+            <a:r>
+              <a:rPr lang="en-US" sz="3600" dirty="0">
+                <a:solidFill>
+                  <a:srgbClr val="111111"/>
+                </a:solidFill>
+                <a:latin typeface="Times New Roman" pitchFamily="34" charset="0"/>
+                <a:ea typeface="Times New Roman" pitchFamily="34" charset="-122"/>
+                <a:cs typeface="Times New Roman" pitchFamily="34" charset="-120"/>
+              </a:rPr>
+              <a:t>The Earth turns from west to east.</a:t>
+            </a:r>
+            <a:endParaRPr lang="en-US" sz="3600" dirty="0"/>
+          </a:p>
+        </p:txBody>
+      </p:sp>
       <p:pic>
         <p:nvPicPr>
-          <p:cNvPr id="3" name="Image 0" descr="/home/claude/f4/img/minesec_sheet.png">    </p:cNvPr>
+          <p:cNvPr id="5" name="Image 0" descr="/home/claude/f4/img/v2/rotation_mid.png">    </p:cNvPr>
           <p:cNvPicPr>
             <a:picLocks noChangeAspect="1"/>
           </p:cNvPicPr>
@@ -10563,8 +10950,8 @@
         </p:blipFill>
         <p:spPr>
           <a:xfrm>
-            <a:off x="0" y="658368"/>
-            <a:ext cx="5120640" cy="5833872"/>
+            <a:off x="5349240" y="2617506"/>
+            <a:ext cx="6659575" cy="2601397"/>
           </a:xfrm>
           <a:prstGeom prst="rect">
             <a:avLst/>
@@ -10573,14 +10960,14 @@
       </p:pic>
       <p:sp>
         <p:nvSpPr>
-          <p:cNvPr id="4" name="Text 1"/>
+          <p:cNvPr id="6" name="Text 3"/>
           <p:cNvSpPr/>
           <p:nvPr/>
         </p:nvSpPr>
         <p:spPr>
           <a:xfrm>
-            <a:off x="5349240" y="1005840"/>
-            <a:ext cx="6522415" cy="731520"/>
+            <a:off x="5349240" y="6089904"/>
+            <a:ext cx="6659575" cy="347472"/>
           </a:xfrm>
           <a:prstGeom prst="rect">
             <a:avLst/>
@@ -10589,85 +10976,24 @@
           <a:ln/>
         </p:spPr>
         <p:txBody>
-          <a:bodyPr wrap="square" lIns="0" tIns="0" rIns="0" bIns="0" rtlCol="0" anchor="ctr">
-            <a:normAutofit/>
-          </a:bodyPr>
+          <a:bodyPr wrap="square" lIns="0" tIns="0" rIns="0" bIns="0" rtlCol="0" anchor="ctr"/>
           <a:lstStyle/>
           <a:p>
             <a:pPr algn="ctr" indent="0" marL="0">
               <a:buNone/>
             </a:pPr>
             <a:r>
-              <a:rPr lang="en-US" sz="3600" b="1" dirty="0">
-                <a:solidFill>
-                  <a:srgbClr val="990011"/>
+              <a:rPr lang="en-US" sz="1600" i="1" dirty="0">
+                <a:solidFill>
+                  <a:srgbClr val="555555"/>
                 </a:solidFill>
                 <a:latin typeface="Times New Roman" pitchFamily="34" charset="0"/>
                 <a:ea typeface="Times New Roman" pitchFamily="34" charset="-122"/>
                 <a:cs typeface="Times New Roman" pitchFamily="34" charset="-120"/>
               </a:rPr>
-              <a:t>1. Meaning of Rotation (continued)</a:t>
-            </a:r>
-            <a:endParaRPr lang="en-US" sz="3600" dirty="0"/>
-          </a:p>
-        </p:txBody>
-      </p:sp>
-      <p:sp>
-        <p:nvSpPr>
-          <p:cNvPr id="5" name="Text 2"/>
-          <p:cNvSpPr/>
-          <p:nvPr/>
-        </p:nvSpPr>
-        <p:spPr>
-          <a:xfrm>
-            <a:off x="5349240" y="1783080"/>
-            <a:ext cx="6522415" cy="4663440"/>
-          </a:xfrm>
-          <a:prstGeom prst="rect">
-            <a:avLst/>
-          </a:prstGeom>
-          <a:noFill/>
-          <a:ln/>
-        </p:spPr>
-        <p:txBody>
-          <a:bodyPr wrap="square" lIns="0" tIns="0" rIns="0" bIns="0" rtlCol="0" anchor="t"/>
-          <a:lstStyle/>
-          <a:p>
-            <a:pPr algn="l" indent="0" marL="0">
-              <a:spcAft>
-                <a:spcPts val="800"/>
-              </a:spcAft>
-              <a:buNone/>
-            </a:pPr>
-            <a:r>
-              <a:rPr lang="en-US" sz="4000" b="1" dirty="0">
-                <a:solidFill>
-                  <a:srgbClr val="111111"/>
-                </a:solidFill>
-                <a:latin typeface="Times New Roman" pitchFamily="34" charset="0"/>
-                <a:ea typeface="Times New Roman" pitchFamily="34" charset="-122"/>
-                <a:cs typeface="Times New Roman" pitchFamily="34" charset="-120"/>
-              </a:rPr>
-              <a:t>Direction and time: </a:t>
-            </a:r>
-            <a:pPr algn="l" indent="0" marL="0">
-              <a:spcAft>
-                <a:spcPts val="800"/>
-              </a:spcAft>
-              <a:buNone/>
-            </a:pPr>
-            <a:r>
-              <a:rPr lang="en-US" sz="4000" dirty="0">
-                <a:solidFill>
-                  <a:srgbClr val="111111"/>
-                </a:solidFill>
-                <a:latin typeface="Times New Roman" pitchFamily="34" charset="0"/>
-                <a:ea typeface="Times New Roman" pitchFamily="34" charset="-122"/>
-                <a:cs typeface="Times New Roman" pitchFamily="34" charset="-120"/>
-              </a:rPr>
-              <a:t>The Earth turns from west to east and makes one turn in 24 hours.</a:t>
-            </a:r>
-            <a:endParaRPr lang="en-US" sz="4000" dirty="0"/>
+              <a:t>Illustration: the rotation of the Earth</a:t>
+            </a:r>
+            <a:endParaRPr lang="en-US" sz="1600" dirty="0"/>
           </a:p>
         </p:txBody>
       </p:sp>
@@ -11792,48 +12118,9 @@
           </a:p>
         </p:txBody>
       </p:sp>
-      <p:sp>
-        <p:nvSpPr>
-          <p:cNvPr id="3" name="Text 1"/>
-          <p:cNvSpPr/>
-          <p:nvPr/>
-        </p:nvSpPr>
-        <p:spPr>
-          <a:xfrm>
-            <a:off x="457200" y="1005840"/>
-            <a:ext cx="11277295" cy="731520"/>
-          </a:xfrm>
-          <a:prstGeom prst="rect">
-            <a:avLst/>
-          </a:prstGeom>
-          <a:noFill/>
-          <a:ln/>
-        </p:spPr>
-        <p:txBody>
-          <a:bodyPr wrap="square" lIns="0" tIns="0" rIns="0" bIns="0" rtlCol="0" anchor="ctr"/>
-          <a:lstStyle/>
-          <a:p>
-            <a:pPr algn="ctr" indent="0" marL="0">
-              <a:buNone/>
-            </a:pPr>
-            <a:r>
-              <a:rPr lang="en-US" sz="3600" b="1" dirty="0">
-                <a:solidFill>
-                  <a:srgbClr val="990011"/>
-                </a:solidFill>
-                <a:latin typeface="Times New Roman" pitchFamily="34" charset="0"/>
-                <a:ea typeface="Times New Roman" pitchFamily="34" charset="-122"/>
-                <a:cs typeface="Times New Roman" pitchFamily="34" charset="-120"/>
-              </a:rPr>
-              <a:t>1. Meaning of Rotation</a:t>
-            </a:r>
-            <a:endParaRPr lang="en-US" sz="3600" dirty="0"/>
-          </a:p>
-        </p:txBody>
-      </p:sp>
       <p:pic>
         <p:nvPicPr>
-          <p:cNvPr id="4" name="Image 0" descr="/home/claude/f4/img/v2/rotation_mid.png">    </p:cNvPr>
+          <p:cNvPr id="3" name="Image 0" descr="/home/claude/f4/img/minesec_sheet.png">    </p:cNvPr>
           <p:cNvPicPr>
             <a:picLocks noChangeAspect="1"/>
           </p:cNvPicPr>
@@ -11847,8 +12134,8 @@
         </p:blipFill>
         <p:spPr>
           <a:xfrm>
-            <a:off x="629930" y="1783080"/>
-            <a:ext cx="10931835" cy="4270248"/>
+            <a:off x="0" y="658368"/>
+            <a:ext cx="3840480" cy="5833872"/>
           </a:xfrm>
           <a:prstGeom prst="rect">
             <a:avLst/>
@@ -11857,14 +12144,14 @@
       </p:pic>
       <p:sp>
         <p:nvSpPr>
-          <p:cNvPr id="5" name="Text 2"/>
+          <p:cNvPr id="4" name="Text 1"/>
           <p:cNvSpPr/>
           <p:nvPr/>
         </p:nvSpPr>
         <p:spPr>
           <a:xfrm>
-            <a:off x="457200" y="6089904"/>
-            <a:ext cx="11277295" cy="347472"/>
+            <a:off x="4069080" y="1005840"/>
+            <a:ext cx="7802575" cy="731520"/>
           </a:xfrm>
           <a:prstGeom prst="rect">
             <a:avLst/>
@@ -11873,24 +12160,159 @@
           <a:ln/>
         </p:spPr>
         <p:txBody>
-          <a:bodyPr wrap="square" lIns="0" tIns="0" rIns="0" bIns="0" rtlCol="0" anchor="ctr"/>
+          <a:bodyPr wrap="square" lIns="0" tIns="0" rIns="0" bIns="0" rtlCol="0" anchor="ctr">
+            <a:normAutofit/>
+          </a:bodyPr>
           <a:lstStyle/>
           <a:p>
             <a:pPr algn="ctr" indent="0" marL="0">
               <a:buNone/>
             </a:pPr>
             <a:r>
-              <a:rPr lang="en-US" sz="1800" i="1" dirty="0">
-                <a:solidFill>
-                  <a:srgbClr val="555555"/>
+              <a:rPr lang="en-US" sz="3600" b="1" dirty="0">
+                <a:solidFill>
+                  <a:srgbClr val="990011"/>
                 </a:solidFill>
                 <a:latin typeface="Times New Roman" pitchFamily="34" charset="0"/>
                 <a:ea typeface="Times New Roman" pitchFamily="34" charset="-122"/>
                 <a:cs typeface="Times New Roman" pitchFamily="34" charset="-120"/>
               </a:rPr>
-              <a:t>Illustration: the rotation of the Earth</a:t>
-            </a:r>
-            <a:endParaRPr lang="en-US" sz="1800" dirty="0"/>
+              <a:t>1. Meaning and Illustration of Rotation</a:t>
+            </a:r>
+            <a:endParaRPr lang="en-US" sz="3600" dirty="0"/>
+          </a:p>
+        </p:txBody>
+      </p:sp>
+      <p:sp>
+        <p:nvSpPr>
+          <p:cNvPr id="5" name="Text 2"/>
+          <p:cNvSpPr/>
+          <p:nvPr/>
+        </p:nvSpPr>
+        <p:spPr>
+          <a:xfrm>
+            <a:off x="4069080" y="1783080"/>
+            <a:ext cx="7802575" cy="4663440"/>
+          </a:xfrm>
+          <a:prstGeom prst="rect">
+            <a:avLst/>
+          </a:prstGeom>
+          <a:noFill/>
+          <a:ln/>
+        </p:spPr>
+        <p:txBody>
+          <a:bodyPr wrap="square" lIns="0" tIns="0" rIns="0" bIns="0" rtlCol="0" anchor="t"/>
+          <a:lstStyle/>
+          <a:p>
+            <a:pPr algn="l" indent="0" marL="0">
+              <a:spcAft>
+                <a:spcPts val="800"/>
+              </a:spcAft>
+              <a:buNone/>
+            </a:pPr>
+            <a:r>
+              <a:rPr lang="en-US" sz="4000" b="1" dirty="0">
+                <a:solidFill>
+                  <a:srgbClr val="111111"/>
+                </a:solidFill>
+                <a:latin typeface="Times New Roman" pitchFamily="34" charset="0"/>
+                <a:ea typeface="Times New Roman" pitchFamily="34" charset="-122"/>
+                <a:cs typeface="Times New Roman" pitchFamily="34" charset="-120"/>
+              </a:rPr>
+              <a:t>Duration: </a:t>
+            </a:r>
+            <a:pPr algn="l" indent="0" marL="0">
+              <a:spcAft>
+                <a:spcPts val="800"/>
+              </a:spcAft>
+              <a:buNone/>
+            </a:pPr>
+            <a:r>
+              <a:rPr lang="en-US" sz="4000" dirty="0">
+                <a:solidFill>
+                  <a:srgbClr val="111111"/>
+                </a:solidFill>
+                <a:latin typeface="Times New Roman" pitchFamily="34" charset="0"/>
+                <a:ea typeface="Times New Roman" pitchFamily="34" charset="-122"/>
+                <a:cs typeface="Times New Roman" pitchFamily="34" charset="-120"/>
+              </a:rPr>
+              <a:t>One complete turn takes 24 hours, which is one day.</a:t>
+            </a:r>
+            <a:endParaRPr lang="en-US" sz="4000" dirty="0"/>
+          </a:p>
+          <a:p>
+            <a:pPr algn="l" indent="0" marL="0">
+              <a:spcAft>
+                <a:spcPts val="800"/>
+              </a:spcAft>
+              <a:buNone/>
+            </a:pPr>
+            <a:r>
+              <a:rPr lang="en-US" sz="4000" b="1" dirty="0">
+                <a:solidFill>
+                  <a:srgbClr val="111111"/>
+                </a:solidFill>
+                <a:latin typeface="Times New Roman" pitchFamily="34" charset="0"/>
+                <a:ea typeface="Times New Roman" pitchFamily="34" charset="-122"/>
+                <a:cs typeface="Times New Roman" pitchFamily="34" charset="-120"/>
+              </a:rPr>
+              <a:t>Tilt of the axis: </a:t>
+            </a:r>
+            <a:pPr algn="l" indent="0" marL="0">
+              <a:spcAft>
+                <a:spcPts val="800"/>
+              </a:spcAft>
+              <a:buNone/>
+            </a:pPr>
+            <a:r>
+              <a:rPr lang="en-US" sz="4000" dirty="0">
+                <a:solidFill>
+                  <a:srgbClr val="111111"/>
+                </a:solidFill>
+                <a:latin typeface="Times New Roman" pitchFamily="34" charset="0"/>
+                <a:ea typeface="Times New Roman" pitchFamily="34" charset="-122"/>
+                <a:cs typeface="Times New Roman" pitchFamily="34" charset="-120"/>
+              </a:rPr>
+              <a:t>The axis is tilted at 23½° from the vertical.</a:t>
+            </a:r>
+            <a:endParaRPr lang="en-US" sz="4000" dirty="0"/>
+          </a:p>
+          <a:p>
+            <a:pPr algn="l" indent="0" marL="0">
+              <a:spcAft>
+                <a:spcPts val="800"/>
+              </a:spcAft>
+              <a:buNone/>
+            </a:pPr>
+            <a:r>
+              <a:rPr lang="en-US" sz="4000" b="1" dirty="0">
+                <a:solidFill>
+                  <a:srgbClr val="111111"/>
+                </a:solidFill>
+                <a:latin typeface="Times New Roman" pitchFamily="34" charset="0"/>
+                <a:ea typeface="Times New Roman" pitchFamily="34" charset="-122"/>
+                <a:cs typeface="Times New Roman" pitchFamily="34" charset="-120"/>
+              </a:rPr>
+              <a:t>Speed: </a:t>
+            </a:r>
+            <a:pPr algn="l" indent="0" marL="0">
+              <a:spcAft>
+                <a:spcPts val="800"/>
+              </a:spcAft>
+              <a:buNone/>
+            </a:pPr>
+            <a:r>
+              <a:rPr lang="en-US" sz="4000" dirty="0">
+                <a:solidFill>
+                  <a:srgbClr val="111111"/>
+                </a:solidFill>
+                <a:latin typeface="Times New Roman" pitchFamily="34" charset="0"/>
+                <a:ea typeface="Times New Roman" pitchFamily="34" charset="-122"/>
+                <a:cs typeface="Times New Roman" pitchFamily="34" charset="-120"/>
+              </a:rPr>
+              <a:t>A place on the Equator moves at about 1,670 km per hour.</a:t>
+            </a:r>
+            <a:endParaRPr lang="en-US" sz="4000" dirty="0"/>
           </a:p>
         </p:txBody>
       </p:sp>
@@ -12006,9 +12428,129 @@
           </a:p>
         </p:txBody>
       </p:sp>
+      <p:sp>
+        <p:nvSpPr>
+          <p:cNvPr id="3" name="Text 1"/>
+          <p:cNvSpPr/>
+          <p:nvPr/>
+        </p:nvSpPr>
+        <p:spPr>
+          <a:xfrm>
+            <a:off x="365760" y="1005840"/>
+            <a:ext cx="11460175" cy="731520"/>
+          </a:xfrm>
+          <a:prstGeom prst="rect">
+            <a:avLst/>
+          </a:prstGeom>
+          <a:noFill/>
+          <a:ln/>
+        </p:spPr>
+        <p:txBody>
+          <a:bodyPr wrap="square" lIns="0" tIns="0" rIns="0" bIns="0" rtlCol="0" anchor="ctr">
+            <a:normAutofit/>
+          </a:bodyPr>
+          <a:lstStyle/>
+          <a:p>
+            <a:pPr algn="ctr" indent="0" marL="0">
+              <a:buNone/>
+            </a:pPr>
+            <a:r>
+              <a:rPr lang="en-US" sz="3600" b="1" dirty="0">
+                <a:solidFill>
+                  <a:srgbClr val="990011"/>
+                </a:solidFill>
+                <a:latin typeface="Times New Roman" pitchFamily="34" charset="0"/>
+                <a:ea typeface="Times New Roman" pitchFamily="34" charset="-122"/>
+                <a:cs typeface="Times New Roman" pitchFamily="34" charset="-120"/>
+              </a:rPr>
+              <a:t>2. Effects of Rotation</a:t>
+            </a:r>
+            <a:endParaRPr lang="en-US" sz="3600" dirty="0"/>
+          </a:p>
+        </p:txBody>
+      </p:sp>
+      <p:sp>
+        <p:nvSpPr>
+          <p:cNvPr id="4" name="Text 2"/>
+          <p:cNvSpPr/>
+          <p:nvPr/>
+        </p:nvSpPr>
+        <p:spPr>
+          <a:xfrm>
+            <a:off x="365760" y="1783080"/>
+            <a:ext cx="4846320" cy="4617720"/>
+          </a:xfrm>
+          <a:prstGeom prst="rect">
+            <a:avLst/>
+          </a:prstGeom>
+          <a:noFill/>
+          <a:ln/>
+        </p:spPr>
+        <p:txBody>
+          <a:bodyPr wrap="square" lIns="0" tIns="0" rIns="0" bIns="0" rtlCol="0" anchor="t"/>
+          <a:lstStyle/>
+          <a:p>
+            <a:pPr algn="l" indent="0" marL="0">
+              <a:spcAft>
+                <a:spcPts val="800"/>
+              </a:spcAft>
+              <a:buNone/>
+            </a:pPr>
+            <a:r>
+              <a:rPr lang="en-US" sz="3600" i="1" dirty="0">
+                <a:solidFill>
+                  <a:srgbClr val="111111"/>
+                </a:solidFill>
+                <a:latin typeface="Times New Roman" pitchFamily="34" charset="0"/>
+                <a:ea typeface="Times New Roman" pitchFamily="34" charset="-122"/>
+                <a:cs typeface="Times New Roman" pitchFamily="34" charset="-120"/>
+              </a:rPr>
+              <a:t>The rotation of the Earth has the following effects:</a:t>
+            </a:r>
+            <a:endParaRPr lang="en-US" sz="3600" dirty="0"/>
+          </a:p>
+          <a:p>
+            <a:pPr algn="l" indent="0" marL="0">
+              <a:spcAft>
+                <a:spcPts val="800"/>
+              </a:spcAft>
+              <a:buNone/>
+            </a:pPr>
+            <a:r>
+              <a:rPr lang="en-US" sz="3600" b="1" dirty="0">
+                <a:solidFill>
+                  <a:srgbClr val="111111"/>
+                </a:solidFill>
+                <a:latin typeface="Times New Roman" pitchFamily="34" charset="0"/>
+                <a:ea typeface="Times New Roman" pitchFamily="34" charset="-122"/>
+                <a:cs typeface="Times New Roman" pitchFamily="34" charset="-120"/>
+              </a:rPr>
+              <a:t>Day and night: </a:t>
+            </a:r>
+            <a:pPr algn="l" indent="0" marL="0">
+              <a:spcAft>
+                <a:spcPts val="800"/>
+              </a:spcAft>
+              <a:buNone/>
+            </a:pPr>
+            <a:r>
+              <a:rPr lang="en-US" sz="3600" dirty="0">
+                <a:solidFill>
+                  <a:srgbClr val="111111"/>
+                </a:solidFill>
+                <a:latin typeface="Times New Roman" pitchFamily="34" charset="0"/>
+                <a:ea typeface="Times New Roman" pitchFamily="34" charset="-122"/>
+                <a:cs typeface="Times New Roman" pitchFamily="34" charset="-120"/>
+              </a:rPr>
+              <a:t>The side facing the Sun has day, while the other side has night.</a:t>
+            </a:r>
+            <a:endParaRPr lang="en-US" sz="3600" dirty="0"/>
+          </a:p>
+        </p:txBody>
+      </p:sp>
       <p:pic>
         <p:nvPicPr>
-          <p:cNvPr id="3" name="Image 0" descr="/home/claude/f4/img/minesec_sheet.png">    </p:cNvPr>
+          <p:cNvPr id="5" name="Image 0" descr="/home/claude/f4/img/v2/rotation_mid.png">    </p:cNvPr>
           <p:cNvPicPr>
             <a:picLocks noChangeAspect="1"/>
           </p:cNvPicPr>
@@ -12022,8 +12564,8 @@
         </p:blipFill>
         <p:spPr>
           <a:xfrm>
-            <a:off x="0" y="658368"/>
-            <a:ext cx="2468880" cy="5833872"/>
+            <a:off x="5349240" y="2617506"/>
+            <a:ext cx="6659575" cy="2601397"/>
           </a:xfrm>
           <a:prstGeom prst="rect">
             <a:avLst/>
@@ -12032,14 +12574,14 @@
       </p:pic>
       <p:sp>
         <p:nvSpPr>
-          <p:cNvPr id="4" name="Text 1"/>
+          <p:cNvPr id="6" name="Text 3"/>
           <p:cNvSpPr/>
           <p:nvPr/>
         </p:nvSpPr>
         <p:spPr>
           <a:xfrm>
-            <a:off x="2697480" y="1005840"/>
-            <a:ext cx="9174175" cy="731520"/>
+            <a:off x="5349240" y="6089904"/>
+            <a:ext cx="6659575" cy="347472"/>
           </a:xfrm>
           <a:prstGeom prst="rect">
             <a:avLst/>
@@ -12048,142 +12590,24 @@
           <a:ln/>
         </p:spPr>
         <p:txBody>
-          <a:bodyPr wrap="square" lIns="0" tIns="0" rIns="0" bIns="0" rtlCol="0" anchor="ctr">
-            <a:normAutofit/>
-          </a:bodyPr>
+          <a:bodyPr wrap="square" lIns="0" tIns="0" rIns="0" bIns="0" rtlCol="0" anchor="ctr"/>
           <a:lstStyle/>
           <a:p>
             <a:pPr algn="ctr" indent="0" marL="0">
               <a:buNone/>
             </a:pPr>
             <a:r>
-              <a:rPr lang="en-US" sz="3600" b="1" dirty="0">
-                <a:solidFill>
-                  <a:srgbClr val="990011"/>
+              <a:rPr lang="en-US" sz="1600" i="1" dirty="0">
+                <a:solidFill>
+                  <a:srgbClr val="555555"/>
                 </a:solidFill>
                 <a:latin typeface="Times New Roman" pitchFamily="34" charset="0"/>
                 <a:ea typeface="Times New Roman" pitchFamily="34" charset="-122"/>
                 <a:cs typeface="Times New Roman" pitchFamily="34" charset="-120"/>
               </a:rPr>
-              <a:t>2. Effects of Rotation</a:t>
-            </a:r>
-            <a:endParaRPr lang="en-US" sz="3600" dirty="0"/>
-          </a:p>
-        </p:txBody>
-      </p:sp>
-      <p:sp>
-        <p:nvSpPr>
-          <p:cNvPr id="5" name="Text 2"/>
-          <p:cNvSpPr/>
-          <p:nvPr/>
-        </p:nvSpPr>
-        <p:spPr>
-          <a:xfrm>
-            <a:off x="2697480" y="1783080"/>
-            <a:ext cx="9174175" cy="4663440"/>
-          </a:xfrm>
-          <a:prstGeom prst="rect">
-            <a:avLst/>
-          </a:prstGeom>
-          <a:noFill/>
-          <a:ln/>
-        </p:spPr>
-        <p:txBody>
-          <a:bodyPr wrap="square" lIns="0" tIns="0" rIns="0" bIns="0" rtlCol="0" anchor="t"/>
-          <a:lstStyle/>
-          <a:p>
-            <a:pPr algn="l" indent="0" marL="0">
-              <a:spcAft>
-                <a:spcPts val="800"/>
-              </a:spcAft>
-              <a:buNone/>
-            </a:pPr>
-            <a:r>
-              <a:rPr lang="en-US" sz="4000" i="1" dirty="0">
-                <a:solidFill>
-                  <a:srgbClr val="111111"/>
-                </a:solidFill>
-                <a:latin typeface="Times New Roman" pitchFamily="34" charset="0"/>
-                <a:ea typeface="Times New Roman" pitchFamily="34" charset="-122"/>
-                <a:cs typeface="Times New Roman" pitchFamily="34" charset="-120"/>
-              </a:rPr>
-              <a:t>The rotation of the Earth has the following effects:</a:t>
-            </a:r>
-            <a:endParaRPr lang="en-US" sz="4000" dirty="0"/>
-          </a:p>
-          <a:p>
-            <a:pPr algn="l" indent="0" marL="0">
-              <a:spcAft>
-                <a:spcPts val="800"/>
-              </a:spcAft>
-              <a:buNone/>
-            </a:pPr>
-            <a:r>
-              <a:rPr lang="en-US" sz="4000" b="1" dirty="0">
-                <a:solidFill>
-                  <a:srgbClr val="111111"/>
-                </a:solidFill>
-                <a:latin typeface="Times New Roman" pitchFamily="34" charset="0"/>
-                <a:ea typeface="Times New Roman" pitchFamily="34" charset="-122"/>
-                <a:cs typeface="Times New Roman" pitchFamily="34" charset="-120"/>
-              </a:rPr>
-              <a:t>Day and night: </a:t>
-            </a:r>
-            <a:pPr algn="l" indent="0" marL="0">
-              <a:spcAft>
-                <a:spcPts val="800"/>
-              </a:spcAft>
-              <a:buNone/>
-            </a:pPr>
-            <a:r>
-              <a:rPr lang="en-US" sz="4000" dirty="0">
-                <a:solidFill>
-                  <a:srgbClr val="111111"/>
-                </a:solidFill>
-                <a:latin typeface="Times New Roman" pitchFamily="34" charset="0"/>
-                <a:ea typeface="Times New Roman" pitchFamily="34" charset="-122"/>
-                <a:cs typeface="Times New Roman" pitchFamily="34" charset="-120"/>
-              </a:rPr>
-              <a:t>The side facing the Sun has day while the other side has night.</a:t>
-            </a:r>
-            <a:endParaRPr lang="en-US" sz="4000" dirty="0"/>
-          </a:p>
-          <a:p>
-            <a:pPr algn="l" indent="0" marL="0">
-              <a:spcAft>
-                <a:spcPts val="800"/>
-              </a:spcAft>
-              <a:buNone/>
-            </a:pPr>
-            <a:r>
-              <a:rPr lang="en-US" sz="4000" b="1" dirty="0">
-                <a:solidFill>
-                  <a:srgbClr val="111111"/>
-                </a:solidFill>
-                <a:latin typeface="Times New Roman" pitchFamily="34" charset="0"/>
-                <a:ea typeface="Times New Roman" pitchFamily="34" charset="-122"/>
-                <a:cs typeface="Times New Roman" pitchFamily="34" charset="-120"/>
-              </a:rPr>
-              <a:t>Sunrise in the east: </a:t>
-            </a:r>
-            <a:pPr algn="l" indent="0" marL="0">
-              <a:spcAft>
-                <a:spcPts val="800"/>
-              </a:spcAft>
-              <a:buNone/>
-            </a:pPr>
-            <a:r>
-              <a:rPr lang="en-US" sz="4000" dirty="0">
-                <a:solidFill>
-                  <a:srgbClr val="111111"/>
-                </a:solidFill>
-                <a:latin typeface="Times New Roman" pitchFamily="34" charset="0"/>
-                <a:ea typeface="Times New Roman" pitchFamily="34" charset="-122"/>
-                <a:cs typeface="Times New Roman" pitchFamily="34" charset="-120"/>
-              </a:rPr>
-              <a:t>The Sun rises in the east and sets in the west because the Earth turns eastwards.</a:t>
-            </a:r>
-            <a:endParaRPr lang="en-US" sz="4000" dirty="0"/>
+              <a:t>Illustration: day and night</a:t>
+            </a:r>
+            <a:endParaRPr lang="en-US" sz="1600" dirty="0"/>
           </a:p>
         </p:txBody>
       </p:sp>
@@ -12299,9 +12723,109 @@
           </a:p>
         </p:txBody>
       </p:sp>
+      <p:sp>
+        <p:nvSpPr>
+          <p:cNvPr id="3" name="Text 1"/>
+          <p:cNvSpPr/>
+          <p:nvPr/>
+        </p:nvSpPr>
+        <p:spPr>
+          <a:xfrm>
+            <a:off x="365760" y="1005840"/>
+            <a:ext cx="11460175" cy="731520"/>
+          </a:xfrm>
+          <a:prstGeom prst="rect">
+            <a:avLst/>
+          </a:prstGeom>
+          <a:noFill/>
+          <a:ln/>
+        </p:spPr>
+        <p:txBody>
+          <a:bodyPr wrap="square" lIns="0" tIns="0" rIns="0" bIns="0" rtlCol="0" anchor="ctr">
+            <a:normAutofit/>
+          </a:bodyPr>
+          <a:lstStyle/>
+          <a:p>
+            <a:pPr algn="ctr" indent="0" marL="0">
+              <a:buNone/>
+            </a:pPr>
+            <a:r>
+              <a:rPr lang="en-US" sz="3600" b="1" dirty="0">
+                <a:solidFill>
+                  <a:srgbClr val="990011"/>
+                </a:solidFill>
+                <a:latin typeface="Times New Roman" pitchFamily="34" charset="0"/>
+                <a:ea typeface="Times New Roman" pitchFamily="34" charset="-122"/>
+                <a:cs typeface="Times New Roman" pitchFamily="34" charset="-120"/>
+              </a:rPr>
+              <a:t>2. Effects of Rotation</a:t>
+            </a:r>
+            <a:endParaRPr lang="en-US" sz="3600" dirty="0"/>
+          </a:p>
+        </p:txBody>
+      </p:sp>
+      <p:sp>
+        <p:nvSpPr>
+          <p:cNvPr id="4" name="Text 2"/>
+          <p:cNvSpPr/>
+          <p:nvPr/>
+        </p:nvSpPr>
+        <p:spPr>
+          <a:xfrm>
+            <a:off x="365760" y="1783080"/>
+            <a:ext cx="4846320" cy="4617720"/>
+          </a:xfrm>
+          <a:prstGeom prst="rect">
+            <a:avLst/>
+          </a:prstGeom>
+          <a:noFill/>
+          <a:ln/>
+        </p:spPr>
+        <p:txBody>
+          <a:bodyPr wrap="square" lIns="0" tIns="0" rIns="0" bIns="0" rtlCol="0" anchor="t"/>
+          <a:lstStyle/>
+          <a:p>
+            <a:pPr algn="l" indent="0" marL="0">
+              <a:spcAft>
+                <a:spcPts val="800"/>
+              </a:spcAft>
+              <a:buNone/>
+            </a:pPr>
+            <a:r>
+              <a:rPr lang="en-US" sz="3600" b="1" dirty="0">
+                <a:solidFill>
+                  <a:srgbClr val="111111"/>
+                </a:solidFill>
+                <a:latin typeface="Times New Roman" pitchFamily="34" charset="0"/>
+                <a:ea typeface="Times New Roman" pitchFamily="34" charset="-122"/>
+                <a:cs typeface="Times New Roman" pitchFamily="34" charset="-120"/>
+              </a:rPr>
+              <a:t>Sunrise in the east: </a:t>
+            </a:r>
+            <a:pPr algn="l" indent="0" marL="0">
+              <a:spcAft>
+                <a:spcPts val="800"/>
+              </a:spcAft>
+              <a:buNone/>
+            </a:pPr>
+            <a:r>
+              <a:rPr lang="en-US" sz="3600" dirty="0">
+                <a:solidFill>
+                  <a:srgbClr val="111111"/>
+                </a:solidFill>
+                <a:latin typeface="Times New Roman" pitchFamily="34" charset="0"/>
+                <a:ea typeface="Times New Roman" pitchFamily="34" charset="-122"/>
+                <a:cs typeface="Times New Roman" pitchFamily="34" charset="-120"/>
+              </a:rPr>
+              <a:t>The Sun seems to rise in the east and set in the west because the Earth turns eastwards.</a:t>
+            </a:r>
+            <a:endParaRPr lang="en-US" sz="3600" dirty="0"/>
+          </a:p>
+        </p:txBody>
+      </p:sp>
       <p:pic>
         <p:nvPicPr>
-          <p:cNvPr id="3" name="Image 0" descr="/home/claude/f4/img/minesec_sheet.png">    </p:cNvPr>
+          <p:cNvPr id="5" name="Image 0" descr="/home/claude/f4/img/v2/f4_sunrise.jpg">    </p:cNvPr>
           <p:cNvPicPr>
             <a:picLocks noChangeAspect="1"/>
           </p:cNvPicPr>
@@ -12315,8 +12839,8 @@
         </p:blipFill>
         <p:spPr>
           <a:xfrm>
-            <a:off x="0" y="658368"/>
-            <a:ext cx="1463040" cy="5833872"/>
+            <a:off x="5349240" y="2071212"/>
+            <a:ext cx="6659575" cy="3693983"/>
           </a:xfrm>
           <a:prstGeom prst="rect">
             <a:avLst/>
@@ -12325,14 +12849,14 @@
       </p:pic>
       <p:sp>
         <p:nvSpPr>
-          <p:cNvPr id="4" name="Text 1"/>
+          <p:cNvPr id="6" name="Text 3"/>
           <p:cNvSpPr/>
           <p:nvPr/>
         </p:nvSpPr>
         <p:spPr>
           <a:xfrm>
-            <a:off x="1691640" y="1005840"/>
-            <a:ext cx="10180015" cy="731520"/>
+            <a:off x="5349240" y="6089904"/>
+            <a:ext cx="6659575" cy="347472"/>
           </a:xfrm>
           <a:prstGeom prst="rect">
             <a:avLst/>
@@ -12341,159 +12865,24 @@
           <a:ln/>
         </p:spPr>
         <p:txBody>
-          <a:bodyPr wrap="square" lIns="0" tIns="0" rIns="0" bIns="0" rtlCol="0" anchor="ctr">
-            <a:normAutofit/>
-          </a:bodyPr>
+          <a:bodyPr wrap="square" lIns="0" tIns="0" rIns="0" bIns="0" rtlCol="0" anchor="ctr"/>
           <a:lstStyle/>
           <a:p>
             <a:pPr algn="ctr" indent="0" marL="0">
               <a:buNone/>
             </a:pPr>
             <a:r>
-              <a:rPr lang="en-US" sz="3600" b="1" dirty="0">
-                <a:solidFill>
-                  <a:srgbClr val="990011"/>
+              <a:rPr lang="en-US" sz="1600" i="1" dirty="0">
+                <a:solidFill>
+                  <a:srgbClr val="555555"/>
                 </a:solidFill>
                 <a:latin typeface="Times New Roman" pitchFamily="34" charset="0"/>
                 <a:ea typeface="Times New Roman" pitchFamily="34" charset="-122"/>
                 <a:cs typeface="Times New Roman" pitchFamily="34" charset="-120"/>
               </a:rPr>
-              <a:t>2. Effects of Rotation (continued)</a:t>
-            </a:r>
-            <a:endParaRPr lang="en-US" sz="3600" dirty="0"/>
-          </a:p>
-        </p:txBody>
-      </p:sp>
-      <p:sp>
-        <p:nvSpPr>
-          <p:cNvPr id="5" name="Text 2"/>
-          <p:cNvSpPr/>
-          <p:nvPr/>
-        </p:nvSpPr>
-        <p:spPr>
-          <a:xfrm>
-            <a:off x="1691640" y="1783080"/>
-            <a:ext cx="10180015" cy="4663440"/>
-          </a:xfrm>
-          <a:prstGeom prst="rect">
-            <a:avLst/>
-          </a:prstGeom>
-          <a:noFill/>
-          <a:ln/>
-        </p:spPr>
-        <p:txBody>
-          <a:bodyPr wrap="square" lIns="0" tIns="0" rIns="0" bIns="0" rtlCol="0" anchor="t"/>
-          <a:lstStyle/>
-          <a:p>
-            <a:pPr algn="l" indent="0" marL="0">
-              <a:spcAft>
-                <a:spcPts val="800"/>
-              </a:spcAft>
-              <a:buNone/>
-            </a:pPr>
-            <a:r>
-              <a:rPr lang="en-US" sz="4000" b="1" dirty="0">
-                <a:solidFill>
-                  <a:srgbClr val="111111"/>
-                </a:solidFill>
-                <a:latin typeface="Times New Roman" pitchFamily="34" charset="0"/>
-                <a:ea typeface="Times New Roman" pitchFamily="34" charset="-122"/>
-                <a:cs typeface="Times New Roman" pitchFamily="34" charset="-120"/>
-              </a:rPr>
-              <a:t>Time difference: </a:t>
-            </a:r>
-            <a:pPr algn="l" indent="0" marL="0">
-              <a:spcAft>
-                <a:spcPts val="800"/>
-              </a:spcAft>
-              <a:buNone/>
-            </a:pPr>
-            <a:r>
-              <a:rPr lang="en-US" sz="4000" dirty="0">
-                <a:solidFill>
-                  <a:srgbClr val="111111"/>
-                </a:solidFill>
-                <a:latin typeface="Times New Roman" pitchFamily="34" charset="0"/>
-                <a:ea typeface="Times New Roman" pitchFamily="34" charset="-122"/>
-                <a:cs typeface="Times New Roman" pitchFamily="34" charset="-120"/>
-              </a:rPr>
-              <a:t>Places to the east see the Sun first, so they are ahead in time.</a:t>
-            </a:r>
-            <a:endParaRPr lang="en-US" sz="4000" dirty="0"/>
-          </a:p>
-          <a:p>
-            <a:pPr algn="l" indent="0" marL="0">
-              <a:spcAft>
-                <a:spcPts val="800"/>
-              </a:spcAft>
-              <a:buNone/>
-            </a:pPr>
-            <a:r>
-              <a:rPr lang="en-US" sz="4000" b="1" dirty="0">
-                <a:solidFill>
-                  <a:srgbClr val="111111"/>
-                </a:solidFill>
-                <a:latin typeface="Times New Roman" pitchFamily="34" charset="0"/>
-                <a:ea typeface="Times New Roman" pitchFamily="34" charset="-122"/>
-                <a:cs typeface="Times New Roman" pitchFamily="34" charset="-120"/>
-              </a:rPr>
-              <a:t>Deflection of winds: </a:t>
-            </a:r>
-            <a:pPr algn="l" indent="0" marL="0">
-              <a:spcAft>
-                <a:spcPts val="800"/>
-              </a:spcAft>
-              <a:buNone/>
-            </a:pPr>
-            <a:r>
-              <a:rPr lang="en-US" sz="4000" dirty="0">
-                <a:solidFill>
-                  <a:srgbClr val="111111"/>
-                </a:solidFill>
-                <a:latin typeface="Times New Roman" pitchFamily="34" charset="0"/>
-                <a:ea typeface="Times New Roman" pitchFamily="34" charset="-122"/>
-                <a:cs typeface="Times New Roman" pitchFamily="34" charset="-120"/>
-              </a:rPr>
-              <a:t>Winds and ocean currents are bent to the right in the north and to the left in the south.</a:t>
-            </a:r>
-            <a:endParaRPr lang="en-US" sz="4000" dirty="0"/>
-          </a:p>
-          <a:p>
-            <a:pPr algn="l" indent="0" marL="0">
-              <a:spcAft>
-                <a:spcPts val="800"/>
-              </a:spcAft>
-              <a:buNone/>
-            </a:pPr>
-            <a:r>
-              <a:rPr lang="en-US" sz="4000" b="1" dirty="0">
-                <a:solidFill>
-                  <a:srgbClr val="111111"/>
-                </a:solidFill>
-                <a:latin typeface="Times New Roman" pitchFamily="34" charset="0"/>
-                <a:ea typeface="Times New Roman" pitchFamily="34" charset="-122"/>
-                <a:cs typeface="Times New Roman" pitchFamily="34" charset="-120"/>
-              </a:rPr>
-              <a:t>Tides: </a:t>
-            </a:r>
-            <a:pPr algn="l" indent="0" marL="0">
-              <a:spcAft>
-                <a:spcPts val="800"/>
-              </a:spcAft>
-              <a:buNone/>
-            </a:pPr>
-            <a:r>
-              <a:rPr lang="en-US" sz="4000" dirty="0">
-                <a:solidFill>
-                  <a:srgbClr val="111111"/>
-                </a:solidFill>
-                <a:latin typeface="Times New Roman" pitchFamily="34" charset="0"/>
-                <a:ea typeface="Times New Roman" pitchFamily="34" charset="-122"/>
-                <a:cs typeface="Times New Roman" pitchFamily="34" charset="-120"/>
-              </a:rPr>
-              <a:t>Rotation, with the pull of the Moon, gives two high tides a day.</a:t>
-            </a:r>
-            <a:endParaRPr lang="en-US" sz="4000" dirty="0"/>
+              <a:t>Illustration: the Sun low over the savanna</a:t>
+            </a:r>
+            <a:endParaRPr lang="en-US" sz="1600" dirty="0"/>
           </a:p>
         </p:txBody>
       </p:sp>
@@ -12603,7 +12992,7 @@
                 <a:ea typeface="Calibri" pitchFamily="34" charset="-122"/>
                 <a:cs typeface="Calibri" pitchFamily="34" charset="-120"/>
               </a:rPr>
-              <a:t>FORMATIVE EVALUATION</a:t>
+              <a:t>BOARD SUMMARY</a:t>
             </a:r>
             <a:endParaRPr lang="en-US" sz="1400" dirty="0"/>
           </a:p>
@@ -12668,7 +13057,7 @@
                 <a:ea typeface="Times New Roman" pitchFamily="34" charset="-122"/>
                 <a:cs typeface="Times New Roman" pitchFamily="34" charset="-120"/>
               </a:rPr>
-              <a:t>Evaluation 1</a:t>
+              <a:t>2. Effects of Rotation</a:t>
             </a:r>
             <a:endParaRPr lang="en-US" sz="3600" dirty="0"/>
           </a:p>
@@ -12702,7 +13091,7 @@
               <a:buNone/>
             </a:pPr>
             <a:r>
-              <a:rPr lang="en-US" sz="4000" dirty="0">
+              <a:rPr lang="en-US" sz="4000" b="1" dirty="0">
                 <a:solidFill>
                   <a:srgbClr val="111111"/>
                 </a:solidFill>
@@ -12710,7 +13099,24 @@
                 <a:ea typeface="Times New Roman" pitchFamily="34" charset="-122"/>
                 <a:cs typeface="Times New Roman" pitchFamily="34" charset="-120"/>
               </a:rPr>
-              <a:t>What is rotation?</a:t>
+              <a:t>Difference in time: </a:t>
+            </a:r>
+            <a:pPr algn="l" indent="0" marL="0">
+              <a:spcAft>
+                <a:spcPts val="800"/>
+              </a:spcAft>
+              <a:buNone/>
+            </a:pPr>
+            <a:r>
+              <a:rPr lang="en-US" sz="4000" dirty="0">
+                <a:solidFill>
+                  <a:srgbClr val="111111"/>
+                </a:solidFill>
+                <a:latin typeface="Times New Roman" pitchFamily="34" charset="0"/>
+                <a:ea typeface="Times New Roman" pitchFamily="34" charset="-122"/>
+                <a:cs typeface="Times New Roman" pitchFamily="34" charset="-120"/>
+              </a:rPr>
+              <a:t>Places to the east see the Sun first, so they are ahead in time.</a:t>
             </a:r>
             <a:endParaRPr lang="en-US" sz="4000" dirty="0"/>
           </a:p>
@@ -12822,15 +13228,115 @@
                 <a:ea typeface="Calibri" pitchFamily="34" charset="-122"/>
                 <a:cs typeface="Calibri" pitchFamily="34" charset="-120"/>
               </a:rPr>
-              <a:t>FORMATIVE EVALUATION</a:t>
+              <a:t>BOARD SUMMARY</a:t>
             </a:r>
             <a:endParaRPr lang="en-US" sz="1400" dirty="0"/>
+          </a:p>
+        </p:txBody>
+      </p:sp>
+      <p:sp>
+        <p:nvSpPr>
+          <p:cNvPr id="3" name="Text 1"/>
+          <p:cNvSpPr/>
+          <p:nvPr/>
+        </p:nvSpPr>
+        <p:spPr>
+          <a:xfrm>
+            <a:off x="365760" y="1005840"/>
+            <a:ext cx="11460175" cy="731520"/>
+          </a:xfrm>
+          <a:prstGeom prst="rect">
+            <a:avLst/>
+          </a:prstGeom>
+          <a:noFill/>
+          <a:ln/>
+        </p:spPr>
+        <p:txBody>
+          <a:bodyPr wrap="square" lIns="0" tIns="0" rIns="0" bIns="0" rtlCol="0" anchor="ctr">
+            <a:normAutofit/>
+          </a:bodyPr>
+          <a:lstStyle/>
+          <a:p>
+            <a:pPr algn="ctr" indent="0" marL="0">
+              <a:buNone/>
+            </a:pPr>
+            <a:r>
+              <a:rPr lang="en-US" sz="3600" b="1" dirty="0">
+                <a:solidFill>
+                  <a:srgbClr val="990011"/>
+                </a:solidFill>
+                <a:latin typeface="Times New Roman" pitchFamily="34" charset="0"/>
+                <a:ea typeface="Times New Roman" pitchFamily="34" charset="-122"/>
+                <a:cs typeface="Times New Roman" pitchFamily="34" charset="-120"/>
+              </a:rPr>
+              <a:t>2. Effects of Rotation</a:t>
+            </a:r>
+            <a:endParaRPr lang="en-US" sz="3600" dirty="0"/>
+          </a:p>
+        </p:txBody>
+      </p:sp>
+      <p:sp>
+        <p:nvSpPr>
+          <p:cNvPr id="4" name="Text 2"/>
+          <p:cNvSpPr/>
+          <p:nvPr/>
+        </p:nvSpPr>
+        <p:spPr>
+          <a:xfrm>
+            <a:off x="365760" y="1783080"/>
+            <a:ext cx="4846320" cy="4617720"/>
+          </a:xfrm>
+          <a:prstGeom prst="rect">
+            <a:avLst/>
+          </a:prstGeom>
+          <a:noFill/>
+          <a:ln/>
+        </p:spPr>
+        <p:txBody>
+          <a:bodyPr wrap="square" lIns="0" tIns="0" rIns="0" bIns="0" rtlCol="0" anchor="t"/>
+          <a:lstStyle/>
+          <a:p>
+            <a:pPr algn="l" indent="0" marL="0">
+              <a:spcAft>
+                <a:spcPts val="800"/>
+              </a:spcAft>
+              <a:buNone/>
+            </a:pPr>
+            <a:r>
+              <a:rPr lang="en-US" sz="3600" b="1" dirty="0">
+                <a:solidFill>
+                  <a:srgbClr val="111111"/>
+                </a:solidFill>
+                <a:latin typeface="Times New Roman" pitchFamily="34" charset="0"/>
+                <a:ea typeface="Times New Roman" pitchFamily="34" charset="-122"/>
+                <a:cs typeface="Times New Roman" pitchFamily="34" charset="-120"/>
+              </a:rPr>
+              <a:t>Deflection of winds and currents: </a:t>
+            </a:r>
+            <a:pPr algn="l" indent="0" marL="0">
+              <a:spcAft>
+                <a:spcPts val="800"/>
+              </a:spcAft>
+              <a:buNone/>
+            </a:pPr>
+            <a:r>
+              <a:rPr lang="en-US" sz="3600" dirty="0">
+                <a:solidFill>
+                  <a:srgbClr val="111111"/>
+                </a:solidFill>
+                <a:latin typeface="Times New Roman" pitchFamily="34" charset="0"/>
+                <a:ea typeface="Times New Roman" pitchFamily="34" charset="-122"/>
+                <a:cs typeface="Times New Roman" pitchFamily="34" charset="-120"/>
+              </a:rPr>
+              <a:t>Winds and ocean currents are bent to the right in the Northern Hemisphere and to the left in the Southern Hemisphere.</a:t>
+            </a:r>
+            <a:endParaRPr lang="en-US" sz="3600" dirty="0"/>
           </a:p>
         </p:txBody>
       </p:sp>
       <p:pic>
         <p:nvPicPr>
-          <p:cNvPr id="3" name="Image 0" descr="/home/claude/f4/img/minesec_sheet.png">    </p:cNvPr>
+          <p:cNvPr id="5" name="Image 0" descr="/home/claude/f4/img/v2/coriolis_last.png">    </p:cNvPr>
           <p:cNvPicPr>
             <a:picLocks noChangeAspect="1"/>
           </p:cNvPicPr>
@@ -12844,8 +13350,8 @@
         </p:blipFill>
         <p:spPr>
           <a:xfrm>
-            <a:off x="0" y="658368"/>
-            <a:ext cx="5120640" cy="5833872"/>
+            <a:off x="5349240" y="2617506"/>
+            <a:ext cx="6659575" cy="2601397"/>
           </a:xfrm>
           <a:prstGeom prst="rect">
             <a:avLst/>
@@ -12854,14 +13360,14 @@
       </p:pic>
       <p:sp>
         <p:nvSpPr>
-          <p:cNvPr id="4" name="Text 1"/>
+          <p:cNvPr id="6" name="Text 3"/>
           <p:cNvSpPr/>
           <p:nvPr/>
         </p:nvSpPr>
         <p:spPr>
           <a:xfrm>
-            <a:off x="5349240" y="1005840"/>
-            <a:ext cx="6522415" cy="731520"/>
+            <a:off x="5349240" y="6089904"/>
+            <a:ext cx="6659575" cy="347472"/>
           </a:xfrm>
           <a:prstGeom prst="rect">
             <a:avLst/>
@@ -12870,68 +13376,24 @@
           <a:ln/>
         </p:spPr>
         <p:txBody>
-          <a:bodyPr wrap="square" lIns="0" tIns="0" rIns="0" bIns="0" rtlCol="0" anchor="ctr">
-            <a:normAutofit/>
-          </a:bodyPr>
+          <a:bodyPr wrap="square" lIns="0" tIns="0" rIns="0" bIns="0" rtlCol="0" anchor="ctr"/>
           <a:lstStyle/>
           <a:p>
             <a:pPr algn="ctr" indent="0" marL="0">
               <a:buNone/>
             </a:pPr>
             <a:r>
-              <a:rPr lang="en-US" sz="3600" b="1" dirty="0">
-                <a:solidFill>
-                  <a:srgbClr val="990011"/>
+              <a:rPr lang="en-US" sz="1600" i="1" dirty="0">
+                <a:solidFill>
+                  <a:srgbClr val="555555"/>
                 </a:solidFill>
                 <a:latin typeface="Times New Roman" pitchFamily="34" charset="0"/>
                 <a:ea typeface="Times New Roman" pitchFamily="34" charset="-122"/>
                 <a:cs typeface="Times New Roman" pitchFamily="34" charset="-120"/>
               </a:rPr>
-              <a:t>Expected Answer</a:t>
-            </a:r>
-            <a:endParaRPr lang="en-US" sz="3600" dirty="0"/>
-          </a:p>
-        </p:txBody>
-      </p:sp>
-      <p:sp>
-        <p:nvSpPr>
-          <p:cNvPr id="5" name="Text 2"/>
-          <p:cNvSpPr/>
-          <p:nvPr/>
-        </p:nvSpPr>
-        <p:spPr>
-          <a:xfrm>
-            <a:off x="5349240" y="1783080"/>
-            <a:ext cx="6522415" cy="4663440"/>
-          </a:xfrm>
-          <a:prstGeom prst="rect">
-            <a:avLst/>
-          </a:prstGeom>
-          <a:noFill/>
-          <a:ln/>
-        </p:spPr>
-        <p:txBody>
-          <a:bodyPr wrap="square" lIns="0" tIns="0" rIns="0" bIns="0" rtlCol="0" anchor="t"/>
-          <a:lstStyle/>
-          <a:p>
-            <a:pPr algn="l" indent="0" marL="0">
-              <a:spcAft>
-                <a:spcPts val="800"/>
-              </a:spcAft>
-              <a:buNone/>
-            </a:pPr>
-            <a:r>
-              <a:rPr lang="en-US" sz="4000" dirty="0">
-                <a:solidFill>
-                  <a:srgbClr val="111111"/>
-                </a:solidFill>
-                <a:latin typeface="Times New Roman" pitchFamily="34" charset="0"/>
-                <a:ea typeface="Times New Roman" pitchFamily="34" charset="-122"/>
-                <a:cs typeface="Times New Roman" pitchFamily="34" charset="-120"/>
-              </a:rPr>
-              <a:t>The turning of the Earth on its axis.</a:t>
-            </a:r>
-            <a:endParaRPr lang="en-US" sz="4000" dirty="0"/>
+              <a:t>Illustration: deflection of winds</a:t>
+            </a:r>
+            <a:endParaRPr lang="en-US" sz="1600" dirty="0"/>
           </a:p>
         </p:txBody>
       </p:sp>
@@ -13041,7 +13503,7 @@
                 <a:ea typeface="Calibri" pitchFamily="34" charset="-122"/>
                 <a:cs typeface="Calibri" pitchFamily="34" charset="-120"/>
               </a:rPr>
-              <a:t>FORMATIVE EVALUATION</a:t>
+              <a:t>BOARD SUMMARY</a:t>
             </a:r>
             <a:endParaRPr lang="en-US" sz="1400" dirty="0"/>
           </a:p>
@@ -13106,7 +13568,7 @@
                 <a:ea typeface="Times New Roman" pitchFamily="34" charset="-122"/>
                 <a:cs typeface="Times New Roman" pitchFamily="34" charset="-120"/>
               </a:rPr>
-              <a:t>Evaluation 2</a:t>
+              <a:t>2. Effects of Rotation</a:t>
             </a:r>
             <a:endParaRPr lang="en-US" sz="3600" dirty="0"/>
           </a:p>
@@ -13140,7 +13602,7 @@
               <a:buNone/>
             </a:pPr>
             <a:r>
-              <a:rPr lang="en-US" sz="4000" dirty="0">
+              <a:rPr lang="en-US" sz="4000" b="1" dirty="0">
                 <a:solidFill>
                   <a:srgbClr val="111111"/>
                 </a:solidFill>
@@ -13148,7 +13610,24 @@
                 <a:ea typeface="Times New Roman" pitchFamily="34" charset="-122"/>
                 <a:cs typeface="Times New Roman" pitchFamily="34" charset="-120"/>
               </a:rPr>
-              <a:t>Give two effects of rotation.</a:t>
+              <a:t>Tides: </a:t>
+            </a:r>
+            <a:pPr algn="l" indent="0" marL="0">
+              <a:spcAft>
+                <a:spcPts val="800"/>
+              </a:spcAft>
+              <a:buNone/>
+            </a:pPr>
+            <a:r>
+              <a:rPr lang="en-US" sz="4000" dirty="0">
+                <a:solidFill>
+                  <a:srgbClr val="111111"/>
+                </a:solidFill>
+                <a:latin typeface="Times New Roman" pitchFamily="34" charset="0"/>
+                <a:ea typeface="Times New Roman" pitchFamily="34" charset="-122"/>
+                <a:cs typeface="Times New Roman" pitchFamily="34" charset="-120"/>
+              </a:rPr>
+              <a:t>Rotation, with the pull of the Moon, gives two high tides and two low tides a day.</a:t>
             </a:r>
             <a:endParaRPr lang="en-US" sz="4000" dirty="0"/>
           </a:p>
@@ -13325,7 +13804,7 @@
                 <a:ea typeface="Times New Roman" pitchFamily="34" charset="-122"/>
                 <a:cs typeface="Times New Roman" pitchFamily="34" charset="-120"/>
               </a:rPr>
-              <a:t>Expected Answer</a:t>
+              <a:t>Evaluation 1</a:t>
             </a:r>
             <a:endParaRPr lang="en-US" sz="3600" dirty="0"/>
           </a:p>
@@ -13367,7 +13846,7 @@
                 <a:ea typeface="Times New Roman" pitchFamily="34" charset="-122"/>
                 <a:cs typeface="Times New Roman" pitchFamily="34" charset="-120"/>
               </a:rPr>
-              <a:t>Day and night; the Sun seems to rise in the east.</a:t>
+              <a:t>What is rotation?</a:t>
             </a:r>
             <a:endParaRPr lang="en-US" sz="4000" dirty="0"/>
           </a:p>
@@ -13479,7 +13958,7 @@
                 <a:ea typeface="Calibri" pitchFamily="34" charset="-122"/>
                 <a:cs typeface="Calibri" pitchFamily="34" charset="-120"/>
               </a:rPr>
-              <a:t>REMEDIATION</a:t>
+              <a:t>FORMATIVE EVALUATION</a:t>
             </a:r>
             <a:endParaRPr lang="en-US" sz="1400" dirty="0"/>
           </a:p>
@@ -13502,7 +13981,7 @@
         <p:spPr>
           <a:xfrm>
             <a:off x="0" y="658368"/>
-            <a:ext cx="3840480" cy="5833872"/>
+            <a:ext cx="5120640" cy="5833872"/>
           </a:xfrm>
           <a:prstGeom prst="rect">
             <a:avLst/>
@@ -13517,8 +13996,8 @@
         </p:nvSpPr>
         <p:spPr>
           <a:xfrm>
-            <a:off x="4069080" y="1005840"/>
-            <a:ext cx="7802575" cy="731520"/>
+            <a:off x="5349240" y="1005840"/>
+            <a:ext cx="6522415" cy="731520"/>
           </a:xfrm>
           <a:prstGeom prst="rect">
             <a:avLst/>
@@ -13544,7 +14023,7 @@
                 <a:ea typeface="Times New Roman" pitchFamily="34" charset="-122"/>
                 <a:cs typeface="Times New Roman" pitchFamily="34" charset="-120"/>
               </a:rPr>
-              <a:t>Remediation</a:t>
+              <a:t>Expected Answer</a:t>
             </a:r>
             <a:endParaRPr lang="en-US" sz="3600" dirty="0"/>
           </a:p>
@@ -13558,8 +14037,8 @@
         </p:nvSpPr>
         <p:spPr>
           <a:xfrm>
-            <a:off x="4069080" y="1783080"/>
-            <a:ext cx="7802575" cy="4663440"/>
+            <a:off x="5349240" y="1783080"/>
+            <a:ext cx="6522415" cy="4663440"/>
           </a:xfrm>
           <a:prstGeom prst="rect">
             <a:avLst/>
@@ -13578,7 +14057,7 @@
               <a:buNone/>
             </a:pPr>
             <a:r>
-              <a:rPr lang="en-US" sz="4000" b="1" dirty="0">
+              <a:rPr lang="en-US" sz="4000" dirty="0">
                 <a:solidFill>
                   <a:srgbClr val="111111"/>
                 </a:solidFill>
@@ -13586,73 +14065,7 @@
                 <a:ea typeface="Times New Roman" pitchFamily="34" charset="-122"/>
                 <a:cs typeface="Times New Roman" pitchFamily="34" charset="-120"/>
               </a:rPr>
-              <a:t>Fill in the blanks:</a:t>
-            </a:r>
-            <a:endParaRPr lang="en-US" sz="4000" dirty="0"/>
-          </a:p>
-          <a:p>
-            <a:pPr algn="l" marL="342900" indent="-342900">
-              <a:spcAft>
-                <a:spcPts val="800"/>
-              </a:spcAft>
-              <a:buSzPct val="100000"/>
-              <a:buFont typeface="+mj-lt"/>
-              <a:buAutoNum type="arabicPeriod" startAt="1"/>
-            </a:pPr>
-            <a:r>
-              <a:rPr lang="en-US" sz="4000" dirty="0">
-                <a:solidFill>
-                  <a:srgbClr val="111111"/>
-                </a:solidFill>
-                <a:latin typeface="Times New Roman" pitchFamily="34" charset="0"/>
-                <a:ea typeface="Times New Roman" pitchFamily="34" charset="-122"/>
-                <a:cs typeface="Times New Roman" pitchFamily="34" charset="-120"/>
-              </a:rPr>
-              <a:t>The Earth turns on its ______.</a:t>
-            </a:r>
-            <a:endParaRPr lang="en-US" sz="4000" dirty="0"/>
-          </a:p>
-          <a:p>
-            <a:pPr algn="l" marL="342900" indent="-342900">
-              <a:spcAft>
-                <a:spcPts val="800"/>
-              </a:spcAft>
-              <a:buSzPct val="100000"/>
-              <a:buFont typeface="+mj-lt"/>
-              <a:buAutoNum type="arabicPeriod" startAt="1"/>
-            </a:pPr>
-            <a:r>
-              <a:rPr lang="en-US" sz="4000" dirty="0">
-                <a:solidFill>
-                  <a:srgbClr val="111111"/>
-                </a:solidFill>
-                <a:latin typeface="Times New Roman" pitchFamily="34" charset="0"/>
-                <a:ea typeface="Times New Roman" pitchFamily="34" charset="-122"/>
-                <a:cs typeface="Times New Roman" pitchFamily="34" charset="-120"/>
-              </a:rPr>
-              <a:t>One rotation takes ______ hours.</a:t>
-            </a:r>
-            <a:endParaRPr lang="en-US" sz="4000" dirty="0"/>
-          </a:p>
-          <a:p>
-            <a:pPr algn="l" marL="342900" indent="-342900">
-              <a:spcAft>
-                <a:spcPts val="800"/>
-              </a:spcAft>
-              <a:buSzPct val="100000"/>
-              <a:buFont typeface="+mj-lt"/>
-              <a:buAutoNum type="arabicPeriod" startAt="1"/>
-            </a:pPr>
-            <a:r>
-              <a:rPr lang="en-US" sz="4000" dirty="0">
-                <a:solidFill>
-                  <a:srgbClr val="111111"/>
-                </a:solidFill>
-                <a:latin typeface="Times New Roman" pitchFamily="34" charset="0"/>
-                <a:ea typeface="Times New Roman" pitchFamily="34" charset="-122"/>
-                <a:cs typeface="Times New Roman" pitchFamily="34" charset="-120"/>
-              </a:rPr>
-              <a:t>The Earth turns from west to ______.</a:t>
+              <a:t>The turning of the Earth on its axis.</a:t>
             </a:r>
             <a:endParaRPr lang="en-US" sz="4000" dirty="0"/>
           </a:p>
@@ -13764,7 +14177,7 @@
                 <a:ea typeface="Calibri" pitchFamily="34" charset="-122"/>
                 <a:cs typeface="Calibri" pitchFamily="34" charset="-120"/>
               </a:rPr>
-              <a:t>HOMEWORK</a:t>
+              <a:t>FORMATIVE EVALUATION</a:t>
             </a:r>
             <a:endParaRPr lang="en-US" sz="1400" dirty="0"/>
           </a:p>
@@ -13829,7 +14242,7 @@
                 <a:ea typeface="Times New Roman" pitchFamily="34" charset="-122"/>
                 <a:cs typeface="Times New Roman" pitchFamily="34" charset="-120"/>
               </a:rPr>
-              <a:t>Homework</a:t>
+              <a:t>Evaluation 2</a:t>
             </a:r>
             <a:endParaRPr lang="en-US" sz="3600" dirty="0"/>
           </a:p>
@@ -13871,7 +14284,7 @@
                 <a:ea typeface="Times New Roman" pitchFamily="34" charset="-122"/>
                 <a:cs typeface="Times New Roman" pitchFamily="34" charset="-120"/>
               </a:rPr>
-              <a:t>Ask an elder in which months the rainy season and the dry season start in Garoua. Write the months down.</a:t>
+              <a:t>Give two effects of rotation.</a:t>
             </a:r>
             <a:endParaRPr lang="en-US" sz="4000" dirty="0"/>
           </a:p>
@@ -13983,7 +14396,7 @@
                 <a:ea typeface="Calibri" pitchFamily="34" charset="-122"/>
                 <a:cs typeface="Calibri" pitchFamily="34" charset="-120"/>
               </a:rPr>
-              <a:t>NEXT LESSON</a:t>
+              <a:t>FORMATIVE EVALUATION</a:t>
             </a:r>
             <a:endParaRPr lang="en-US" sz="1400" dirty="0"/>
           </a:p>
@@ -14048,7 +14461,7 @@
                 <a:ea typeface="Times New Roman" pitchFamily="34" charset="-122"/>
                 <a:cs typeface="Times New Roman" pitchFamily="34" charset="-120"/>
               </a:rPr>
-              <a:t>Next Lesson</a:t>
+              <a:t>Expected Answer</a:t>
             </a:r>
             <a:endParaRPr lang="en-US" sz="3600" dirty="0"/>
           </a:p>
@@ -14072,17 +14485,17 @@
           <a:ln/>
         </p:spPr>
         <p:txBody>
-          <a:bodyPr wrap="square" lIns="0" tIns="0" rIns="0" bIns="0" rtlCol="0" anchor="ctr"/>
-          <a:lstStyle/>
-          <a:p>
-            <a:pPr algn="ctr" indent="0" marL="0">
+          <a:bodyPr wrap="square" lIns="0" tIns="0" rIns="0" bIns="0" rtlCol="0" anchor="t"/>
+          <a:lstStyle/>
+          <a:p>
+            <a:pPr algn="l" indent="0" marL="0">
               <a:spcAft>
                 <a:spcPts val="800"/>
               </a:spcAft>
               <a:buNone/>
             </a:pPr>
             <a:r>
-              <a:rPr lang="en-US" sz="4000" b="1" dirty="0">
+              <a:rPr lang="en-US" sz="4000" dirty="0">
                 <a:solidFill>
                   <a:srgbClr val="111111"/>
                 </a:solidFill>
@@ -14090,27 +14503,7 @@
                 <a:ea typeface="Times New Roman" pitchFamily="34" charset="-122"/>
                 <a:cs typeface="Times New Roman" pitchFamily="34" charset="-120"/>
               </a:rPr>
-              <a:t>Our next lesson will be on:</a:t>
-            </a:r>
-            <a:endParaRPr lang="en-US" sz="4000" dirty="0"/>
-          </a:p>
-          <a:p>
-            <a:pPr algn="ctr" indent="0" marL="0">
-              <a:spcAft>
-                <a:spcPts val="800"/>
-              </a:spcAft>
-              <a:buNone/>
-            </a:pPr>
-            <a:r>
-              <a:rPr lang="en-US" sz="4000" b="1" dirty="0">
-                <a:solidFill>
-                  <a:srgbClr val="990011"/>
-                </a:solidFill>
-                <a:latin typeface="Times New Roman" pitchFamily="34" charset="0"/>
-                <a:ea typeface="Times New Roman" pitchFamily="34" charset="-122"/>
-                <a:cs typeface="Times New Roman" pitchFamily="34" charset="-120"/>
-              </a:rPr>
-              <a:t>Lesson 6: The Revolution of the Earth</a:t>
+              <a:t>Day and night; the Sun seems to rise in the east.</a:t>
             </a:r>
             <a:endParaRPr lang="en-US" sz="4000" dirty="0"/>
           </a:p>
@@ -14461,6 +14854,749 @@
                 <a:ea typeface="Calibri" pitchFamily="34" charset="-122"/>
                 <a:cs typeface="Calibri" pitchFamily="34" charset="-120"/>
               </a:rPr>
+              <a:t>REMEDIATION</a:t>
+            </a:r>
+            <a:endParaRPr lang="en-US" sz="1400" dirty="0"/>
+          </a:p>
+        </p:txBody>
+      </p:sp>
+      <p:pic>
+        <p:nvPicPr>
+          <p:cNvPr id="3" name="Image 0" descr="/home/claude/f4/img/minesec_sheet.png">    </p:cNvPr>
+          <p:cNvPicPr>
+            <a:picLocks noChangeAspect="1"/>
+          </p:cNvPicPr>
+          <p:nvPr/>
+        </p:nvPicPr>
+        <p:blipFill>
+          <a:blip r:embed="rId1"/>
+          <a:stretch>
+            <a:fillRect/>
+          </a:stretch>
+        </p:blipFill>
+        <p:spPr>
+          <a:xfrm>
+            <a:off x="0" y="658368"/>
+            <a:ext cx="3840480" cy="5833872"/>
+          </a:xfrm>
+          <a:prstGeom prst="rect">
+            <a:avLst/>
+          </a:prstGeom>
+        </p:spPr>
+      </p:pic>
+      <p:sp>
+        <p:nvSpPr>
+          <p:cNvPr id="4" name="Text 1"/>
+          <p:cNvSpPr/>
+          <p:nvPr/>
+        </p:nvSpPr>
+        <p:spPr>
+          <a:xfrm>
+            <a:off x="4069080" y="1005840"/>
+            <a:ext cx="7802575" cy="731520"/>
+          </a:xfrm>
+          <a:prstGeom prst="rect">
+            <a:avLst/>
+          </a:prstGeom>
+          <a:noFill/>
+          <a:ln/>
+        </p:spPr>
+        <p:txBody>
+          <a:bodyPr wrap="square" lIns="0" tIns="0" rIns="0" bIns="0" rtlCol="0" anchor="ctr">
+            <a:normAutofit/>
+          </a:bodyPr>
+          <a:lstStyle/>
+          <a:p>
+            <a:pPr algn="ctr" indent="0" marL="0">
+              <a:buNone/>
+            </a:pPr>
+            <a:r>
+              <a:rPr lang="en-US" sz="3600" b="1" dirty="0">
+                <a:solidFill>
+                  <a:srgbClr val="990011"/>
+                </a:solidFill>
+                <a:latin typeface="Times New Roman" pitchFamily="34" charset="0"/>
+                <a:ea typeface="Times New Roman" pitchFamily="34" charset="-122"/>
+                <a:cs typeface="Times New Roman" pitchFamily="34" charset="-120"/>
+              </a:rPr>
+              <a:t>Remediation</a:t>
+            </a:r>
+            <a:endParaRPr lang="en-US" sz="3600" dirty="0"/>
+          </a:p>
+        </p:txBody>
+      </p:sp>
+      <p:sp>
+        <p:nvSpPr>
+          <p:cNvPr id="5" name="Text 2"/>
+          <p:cNvSpPr/>
+          <p:nvPr/>
+        </p:nvSpPr>
+        <p:spPr>
+          <a:xfrm>
+            <a:off x="4069080" y="1783080"/>
+            <a:ext cx="7802575" cy="4663440"/>
+          </a:xfrm>
+          <a:prstGeom prst="rect">
+            <a:avLst/>
+          </a:prstGeom>
+          <a:noFill/>
+          <a:ln/>
+        </p:spPr>
+        <p:txBody>
+          <a:bodyPr wrap="square" lIns="0" tIns="0" rIns="0" bIns="0" rtlCol="0" anchor="t"/>
+          <a:lstStyle/>
+          <a:p>
+            <a:pPr algn="l" indent="0" marL="0">
+              <a:spcAft>
+                <a:spcPts val="800"/>
+              </a:spcAft>
+              <a:buNone/>
+            </a:pPr>
+            <a:r>
+              <a:rPr lang="en-US" sz="4000" b="1" dirty="0">
+                <a:solidFill>
+                  <a:srgbClr val="111111"/>
+                </a:solidFill>
+                <a:latin typeface="Times New Roman" pitchFamily="34" charset="0"/>
+                <a:ea typeface="Times New Roman" pitchFamily="34" charset="-122"/>
+                <a:cs typeface="Times New Roman" pitchFamily="34" charset="-120"/>
+              </a:rPr>
+              <a:t>Fill in the blanks:</a:t>
+            </a:r>
+            <a:endParaRPr lang="en-US" sz="4000" dirty="0"/>
+          </a:p>
+          <a:p>
+            <a:pPr algn="l" marL="342900" indent="-342900">
+              <a:spcAft>
+                <a:spcPts val="800"/>
+              </a:spcAft>
+              <a:buSzPct val="100000"/>
+              <a:buFont typeface="+mj-lt"/>
+              <a:buAutoNum type="arabicPeriod" startAt="1"/>
+            </a:pPr>
+            <a:r>
+              <a:rPr lang="en-US" sz="4000" dirty="0">
+                <a:solidFill>
+                  <a:srgbClr val="111111"/>
+                </a:solidFill>
+                <a:latin typeface="Times New Roman" pitchFamily="34" charset="0"/>
+                <a:ea typeface="Times New Roman" pitchFamily="34" charset="-122"/>
+                <a:cs typeface="Times New Roman" pitchFamily="34" charset="-120"/>
+              </a:rPr>
+              <a:t>The Earth turns on its ______.</a:t>
+            </a:r>
+            <a:endParaRPr lang="en-US" sz="4000" dirty="0"/>
+          </a:p>
+          <a:p>
+            <a:pPr algn="l" marL="342900" indent="-342900">
+              <a:spcAft>
+                <a:spcPts val="800"/>
+              </a:spcAft>
+              <a:buSzPct val="100000"/>
+              <a:buFont typeface="+mj-lt"/>
+              <a:buAutoNum type="arabicPeriod" startAt="1"/>
+            </a:pPr>
+            <a:r>
+              <a:rPr lang="en-US" sz="4000" dirty="0">
+                <a:solidFill>
+                  <a:srgbClr val="111111"/>
+                </a:solidFill>
+                <a:latin typeface="Times New Roman" pitchFamily="34" charset="0"/>
+                <a:ea typeface="Times New Roman" pitchFamily="34" charset="-122"/>
+                <a:cs typeface="Times New Roman" pitchFamily="34" charset="-120"/>
+              </a:rPr>
+              <a:t>One rotation takes ______ hours.</a:t>
+            </a:r>
+            <a:endParaRPr lang="en-US" sz="4000" dirty="0"/>
+          </a:p>
+          <a:p>
+            <a:pPr algn="l" marL="342900" indent="-342900">
+              <a:spcAft>
+                <a:spcPts val="800"/>
+              </a:spcAft>
+              <a:buSzPct val="100000"/>
+              <a:buFont typeface="+mj-lt"/>
+              <a:buAutoNum type="arabicPeriod" startAt="1"/>
+            </a:pPr>
+            <a:r>
+              <a:rPr lang="en-US" sz="4000" dirty="0">
+                <a:solidFill>
+                  <a:srgbClr val="111111"/>
+                </a:solidFill>
+                <a:latin typeface="Times New Roman" pitchFamily="34" charset="0"/>
+                <a:ea typeface="Times New Roman" pitchFamily="34" charset="-122"/>
+                <a:cs typeface="Times New Roman" pitchFamily="34" charset="-120"/>
+              </a:rPr>
+              <a:t>The Earth turns from west to ______.</a:t>
+            </a:r>
+            <a:endParaRPr lang="en-US" sz="4000" dirty="0"/>
+          </a:p>
+        </p:txBody>
+      </p:sp>
+      <p:sp>
+        <p:nvSpPr>
+          <p:cNvPr id="25" name="Slide Number Placeholder 0"/>
+          <p:cNvSpPr>
+            <a:spLocks noGrp="1"/>
+          </p:cNvSpPr>
+          <p:nvPr>
+            <p:ph type="sldNum" sz="quarter" idx="4294967295"/>
+          </p:nvPr>
+        </p:nvSpPr>
+        <p:spPr>
+          <a:xfrm>
+            <a:off x="27432" y="91440"/>
+            <a:ext cx="585216" cy="475488"/>
+          </a:xfrm>
+          <a:prstGeom prst="rect">
+            <a:avLst/>
+          </a:prstGeom>
+          <a:extLst>
+            <a:ext uri="{C572A759-6A51-4108-AA02-DFA0A04FC94B}">
+              <ma14:wrappingTextBoxFlag xmlns:ma14="http://schemas.microsoft.com/office/mac/drawingml/2011/main" val="0"/>
+            </a:ext>
+          </a:extLst>
+        </p:spPr>
+        <p:txBody>
+          <a:bodyPr/>
+          <a:lstStyle>
+            <a:lvl1pPr>
+              <a:defRPr sz="2000">
+                <a:solidFill>
+                  <a:srgbClr val="FFFFFF"/>
+                </a:solidFill>
+                <a:latin typeface="Calibri"/>
+                <a:ea typeface="Calibri"/>
+                <a:cs typeface="Calibri"/>
+              </a:defRPr>
+            </a:lvl1pPr>
+          </a:lstStyle>
+          <a:p>
+            <a:pPr algn="ctr"/>
+            <a:fld id="{F7021451-1387-4CA6-816F-3879F97B5CBC}" type="slidenum">
+              <a:rPr b="1" lang="en-US"/>
+              <a:t>40</a:t>
+            </a:fld>
+            <a:endParaRPr lang="en-US"/>
+          </a:p>
+        </p:txBody>
+      </p:sp>
+    </p:spTree>
+  </p:cSld>
+  <p:clrMapOvr>
+    <a:masterClrMapping/>
+  </p:clrMapOvr>
+</p:sld>
+</file>
+
+<file path=ppt/slides/slide41.xml><?xml version="1.0" encoding="utf-8"?>
+<p:sld xmlns:a="http://schemas.openxmlformats.org/drawingml/2006/main" xmlns:r="http://schemas.openxmlformats.org/officeDocument/2006/relationships" xmlns:p="http://schemas.openxmlformats.org/presentationml/2006/main">
+  <p:cSld name="Slide 41">
+    <p:spTree>
+      <p:nvGrpSpPr>
+        <p:cNvPr id="1" name=""/>
+        <p:cNvGrpSpPr/>
+        <p:nvPr/>
+      </p:nvGrpSpPr>
+      <p:grpSpPr>
+        <a:xfrm>
+          <a:off x="0" y="0"/>
+          <a:ext cx="0" cy="0"/>
+          <a:chOff x="0" y="0"/>
+          <a:chExt cx="0" cy="0"/>
+        </a:xfrm>
+      </p:grpSpPr>
+      <p:sp>
+        <p:nvSpPr>
+          <p:cNvPr id="2" name="Text 0"/>
+          <p:cNvSpPr/>
+          <p:nvPr/>
+        </p:nvSpPr>
+        <p:spPr>
+          <a:xfrm>
+            <a:off x="457200" y="713232"/>
+            <a:ext cx="11368735" cy="274320"/>
+          </a:xfrm>
+          <a:prstGeom prst="rect">
+            <a:avLst/>
+          </a:prstGeom>
+          <a:noFill/>
+          <a:ln/>
+        </p:spPr>
+        <p:txBody>
+          <a:bodyPr wrap="square" lIns="0" tIns="0" rIns="0" bIns="0" rtlCol="0" anchor="ctr"/>
+          <a:lstStyle/>
+          <a:p>
+            <a:pPr algn="r" indent="0" marL="0">
+              <a:buNone/>
+            </a:pPr>
+            <a:r>
+              <a:rPr lang="en-US" sz="1400" b="1" dirty="0">
+                <a:solidFill>
+                  <a:srgbClr val="1C3F6E"/>
+                </a:solidFill>
+                <a:latin typeface="Calibri" pitchFamily="34" charset="0"/>
+                <a:ea typeface="Calibri" pitchFamily="34" charset="-122"/>
+                <a:cs typeface="Calibri" pitchFamily="34" charset="-120"/>
+              </a:rPr>
+              <a:t>HOMEWORK</a:t>
+            </a:r>
+            <a:endParaRPr lang="en-US" sz="1400" dirty="0"/>
+          </a:p>
+        </p:txBody>
+      </p:sp>
+      <p:pic>
+        <p:nvPicPr>
+          <p:cNvPr id="3" name="Image 0" descr="/home/claude/f4/img/minesec_sheet.png">    </p:cNvPr>
+          <p:cNvPicPr>
+            <a:picLocks noChangeAspect="1"/>
+          </p:cNvPicPr>
+          <p:nvPr/>
+        </p:nvPicPr>
+        <p:blipFill>
+          <a:blip r:embed="rId1"/>
+          <a:stretch>
+            <a:fillRect/>
+          </a:stretch>
+        </p:blipFill>
+        <p:spPr>
+          <a:xfrm>
+            <a:off x="0" y="658368"/>
+            <a:ext cx="5120640" cy="5833872"/>
+          </a:xfrm>
+          <a:prstGeom prst="rect">
+            <a:avLst/>
+          </a:prstGeom>
+        </p:spPr>
+      </p:pic>
+      <p:sp>
+        <p:nvSpPr>
+          <p:cNvPr id="4" name="Text 1"/>
+          <p:cNvSpPr/>
+          <p:nvPr/>
+        </p:nvSpPr>
+        <p:spPr>
+          <a:xfrm>
+            <a:off x="5349240" y="1005840"/>
+            <a:ext cx="6522415" cy="731520"/>
+          </a:xfrm>
+          <a:prstGeom prst="rect">
+            <a:avLst/>
+          </a:prstGeom>
+          <a:noFill/>
+          <a:ln/>
+        </p:spPr>
+        <p:txBody>
+          <a:bodyPr wrap="square" lIns="0" tIns="0" rIns="0" bIns="0" rtlCol="0" anchor="ctr">
+            <a:normAutofit/>
+          </a:bodyPr>
+          <a:lstStyle/>
+          <a:p>
+            <a:pPr algn="ctr" indent="0" marL="0">
+              <a:buNone/>
+            </a:pPr>
+            <a:r>
+              <a:rPr lang="en-US" sz="3600" b="1" dirty="0">
+                <a:solidFill>
+                  <a:srgbClr val="990011"/>
+                </a:solidFill>
+                <a:latin typeface="Times New Roman" pitchFamily="34" charset="0"/>
+                <a:ea typeface="Times New Roman" pitchFamily="34" charset="-122"/>
+                <a:cs typeface="Times New Roman" pitchFamily="34" charset="-120"/>
+              </a:rPr>
+              <a:t>Homework</a:t>
+            </a:r>
+            <a:endParaRPr lang="en-US" sz="3600" dirty="0"/>
+          </a:p>
+        </p:txBody>
+      </p:sp>
+      <p:sp>
+        <p:nvSpPr>
+          <p:cNvPr id="5" name="Text 2"/>
+          <p:cNvSpPr/>
+          <p:nvPr/>
+        </p:nvSpPr>
+        <p:spPr>
+          <a:xfrm>
+            <a:off x="5349240" y="1783080"/>
+            <a:ext cx="6522415" cy="4663440"/>
+          </a:xfrm>
+          <a:prstGeom prst="rect">
+            <a:avLst/>
+          </a:prstGeom>
+          <a:noFill/>
+          <a:ln/>
+        </p:spPr>
+        <p:txBody>
+          <a:bodyPr wrap="square" lIns="0" tIns="0" rIns="0" bIns="0" rtlCol="0" anchor="t"/>
+          <a:lstStyle/>
+          <a:p>
+            <a:pPr algn="l" indent="0" marL="0">
+              <a:spcAft>
+                <a:spcPts val="800"/>
+              </a:spcAft>
+              <a:buNone/>
+            </a:pPr>
+            <a:r>
+              <a:rPr lang="en-US" sz="4000" dirty="0">
+                <a:solidFill>
+                  <a:srgbClr val="111111"/>
+                </a:solidFill>
+                <a:latin typeface="Times New Roman" pitchFamily="34" charset="0"/>
+                <a:ea typeface="Times New Roman" pitchFamily="34" charset="-122"/>
+                <a:cs typeface="Times New Roman" pitchFamily="34" charset="-120"/>
+              </a:rPr>
+              <a:t>Ask an elder in which months the rainy season and the dry season start in Garoua. Write the months down.</a:t>
+            </a:r>
+            <a:endParaRPr lang="en-US" sz="4000" dirty="0"/>
+          </a:p>
+        </p:txBody>
+      </p:sp>
+      <p:sp>
+        <p:nvSpPr>
+          <p:cNvPr id="25" name="Slide Number Placeholder 0"/>
+          <p:cNvSpPr>
+            <a:spLocks noGrp="1"/>
+          </p:cNvSpPr>
+          <p:nvPr>
+            <p:ph type="sldNum" sz="quarter" idx="4294967295"/>
+          </p:nvPr>
+        </p:nvSpPr>
+        <p:spPr>
+          <a:xfrm>
+            <a:off x="27432" y="91440"/>
+            <a:ext cx="585216" cy="475488"/>
+          </a:xfrm>
+          <a:prstGeom prst="rect">
+            <a:avLst/>
+          </a:prstGeom>
+          <a:extLst>
+            <a:ext uri="{C572A759-6A51-4108-AA02-DFA0A04FC94B}">
+              <ma14:wrappingTextBoxFlag xmlns:ma14="http://schemas.microsoft.com/office/mac/drawingml/2011/main" val="0"/>
+            </a:ext>
+          </a:extLst>
+        </p:spPr>
+        <p:txBody>
+          <a:bodyPr/>
+          <a:lstStyle>
+            <a:lvl1pPr>
+              <a:defRPr sz="2000">
+                <a:solidFill>
+                  <a:srgbClr val="FFFFFF"/>
+                </a:solidFill>
+                <a:latin typeface="Calibri"/>
+                <a:ea typeface="Calibri"/>
+                <a:cs typeface="Calibri"/>
+              </a:defRPr>
+            </a:lvl1pPr>
+          </a:lstStyle>
+          <a:p>
+            <a:pPr algn="ctr"/>
+            <a:fld id="{F7021451-1387-4CA6-816F-3879F97B5CBC}" type="slidenum">
+              <a:rPr b="1" lang="en-US"/>
+              <a:t>41</a:t>
+            </a:fld>
+            <a:endParaRPr lang="en-US"/>
+          </a:p>
+        </p:txBody>
+      </p:sp>
+    </p:spTree>
+  </p:cSld>
+  <p:clrMapOvr>
+    <a:masterClrMapping/>
+  </p:clrMapOvr>
+</p:sld>
+</file>
+
+<file path=ppt/slides/slide42.xml><?xml version="1.0" encoding="utf-8"?>
+<p:sld xmlns:a="http://schemas.openxmlformats.org/drawingml/2006/main" xmlns:r="http://schemas.openxmlformats.org/officeDocument/2006/relationships" xmlns:p="http://schemas.openxmlformats.org/presentationml/2006/main">
+  <p:cSld name="Slide 42">
+    <p:spTree>
+      <p:nvGrpSpPr>
+        <p:cNvPr id="1" name=""/>
+        <p:cNvGrpSpPr/>
+        <p:nvPr/>
+      </p:nvGrpSpPr>
+      <p:grpSpPr>
+        <a:xfrm>
+          <a:off x="0" y="0"/>
+          <a:ext cx="0" cy="0"/>
+          <a:chOff x="0" y="0"/>
+          <a:chExt cx="0" cy="0"/>
+        </a:xfrm>
+      </p:grpSpPr>
+      <p:sp>
+        <p:nvSpPr>
+          <p:cNvPr id="2" name="Text 0"/>
+          <p:cNvSpPr/>
+          <p:nvPr/>
+        </p:nvSpPr>
+        <p:spPr>
+          <a:xfrm>
+            <a:off x="457200" y="713232"/>
+            <a:ext cx="11368735" cy="274320"/>
+          </a:xfrm>
+          <a:prstGeom prst="rect">
+            <a:avLst/>
+          </a:prstGeom>
+          <a:noFill/>
+          <a:ln/>
+        </p:spPr>
+        <p:txBody>
+          <a:bodyPr wrap="square" lIns="0" tIns="0" rIns="0" bIns="0" rtlCol="0" anchor="ctr"/>
+          <a:lstStyle/>
+          <a:p>
+            <a:pPr algn="r" indent="0" marL="0">
+              <a:buNone/>
+            </a:pPr>
+            <a:r>
+              <a:rPr lang="en-US" sz="1400" b="1" dirty="0">
+                <a:solidFill>
+                  <a:srgbClr val="1C3F6E"/>
+                </a:solidFill>
+                <a:latin typeface="Calibri" pitchFamily="34" charset="0"/>
+                <a:ea typeface="Calibri" pitchFamily="34" charset="-122"/>
+                <a:cs typeface="Calibri" pitchFamily="34" charset="-120"/>
+              </a:rPr>
+              <a:t>NEXT LESSON</a:t>
+            </a:r>
+            <a:endParaRPr lang="en-US" sz="1400" dirty="0"/>
+          </a:p>
+        </p:txBody>
+      </p:sp>
+      <p:pic>
+        <p:nvPicPr>
+          <p:cNvPr id="3" name="Image 0" descr="/home/claude/f4/img/minesec_sheet.png">    </p:cNvPr>
+          <p:cNvPicPr>
+            <a:picLocks noChangeAspect="1"/>
+          </p:cNvPicPr>
+          <p:nvPr/>
+        </p:nvPicPr>
+        <p:blipFill>
+          <a:blip r:embed="rId1"/>
+          <a:stretch>
+            <a:fillRect/>
+          </a:stretch>
+        </p:blipFill>
+        <p:spPr>
+          <a:xfrm>
+            <a:off x="0" y="658368"/>
+            <a:ext cx="5120640" cy="5833872"/>
+          </a:xfrm>
+          <a:prstGeom prst="rect">
+            <a:avLst/>
+          </a:prstGeom>
+        </p:spPr>
+      </p:pic>
+      <p:sp>
+        <p:nvSpPr>
+          <p:cNvPr id="4" name="Text 1"/>
+          <p:cNvSpPr/>
+          <p:nvPr/>
+        </p:nvSpPr>
+        <p:spPr>
+          <a:xfrm>
+            <a:off x="5349240" y="1005840"/>
+            <a:ext cx="6522415" cy="731520"/>
+          </a:xfrm>
+          <a:prstGeom prst="rect">
+            <a:avLst/>
+          </a:prstGeom>
+          <a:noFill/>
+          <a:ln/>
+        </p:spPr>
+        <p:txBody>
+          <a:bodyPr wrap="square" lIns="0" tIns="0" rIns="0" bIns="0" rtlCol="0" anchor="ctr">
+            <a:normAutofit/>
+          </a:bodyPr>
+          <a:lstStyle/>
+          <a:p>
+            <a:pPr algn="ctr" indent="0" marL="0">
+              <a:buNone/>
+            </a:pPr>
+            <a:r>
+              <a:rPr lang="en-US" sz="3600" b="1" dirty="0">
+                <a:solidFill>
+                  <a:srgbClr val="990011"/>
+                </a:solidFill>
+                <a:latin typeface="Times New Roman" pitchFamily="34" charset="0"/>
+                <a:ea typeface="Times New Roman" pitchFamily="34" charset="-122"/>
+                <a:cs typeface="Times New Roman" pitchFamily="34" charset="-120"/>
+              </a:rPr>
+              <a:t>Next Lesson</a:t>
+            </a:r>
+            <a:endParaRPr lang="en-US" sz="3600" dirty="0"/>
+          </a:p>
+        </p:txBody>
+      </p:sp>
+      <p:sp>
+        <p:nvSpPr>
+          <p:cNvPr id="5" name="Text 2"/>
+          <p:cNvSpPr/>
+          <p:nvPr/>
+        </p:nvSpPr>
+        <p:spPr>
+          <a:xfrm>
+            <a:off x="5349240" y="1783080"/>
+            <a:ext cx="6522415" cy="4663440"/>
+          </a:xfrm>
+          <a:prstGeom prst="rect">
+            <a:avLst/>
+          </a:prstGeom>
+          <a:noFill/>
+          <a:ln/>
+        </p:spPr>
+        <p:txBody>
+          <a:bodyPr wrap="square" lIns="0" tIns="0" rIns="0" bIns="0" rtlCol="0" anchor="ctr"/>
+          <a:lstStyle/>
+          <a:p>
+            <a:pPr algn="ctr" indent="0" marL="0">
+              <a:spcAft>
+                <a:spcPts val="800"/>
+              </a:spcAft>
+              <a:buNone/>
+            </a:pPr>
+            <a:r>
+              <a:rPr lang="en-US" sz="4000" b="1" dirty="0">
+                <a:solidFill>
+                  <a:srgbClr val="111111"/>
+                </a:solidFill>
+                <a:latin typeface="Times New Roman" pitchFamily="34" charset="0"/>
+                <a:ea typeface="Times New Roman" pitchFamily="34" charset="-122"/>
+                <a:cs typeface="Times New Roman" pitchFamily="34" charset="-120"/>
+              </a:rPr>
+              <a:t>Our next lesson will be on:</a:t>
+            </a:r>
+            <a:endParaRPr lang="en-US" sz="4000" dirty="0"/>
+          </a:p>
+          <a:p>
+            <a:pPr algn="ctr" indent="0" marL="0">
+              <a:spcAft>
+                <a:spcPts val="800"/>
+              </a:spcAft>
+              <a:buNone/>
+            </a:pPr>
+            <a:r>
+              <a:rPr lang="en-US" sz="4000" b="1" dirty="0">
+                <a:solidFill>
+                  <a:srgbClr val="990011"/>
+                </a:solidFill>
+                <a:latin typeface="Times New Roman" pitchFamily="34" charset="0"/>
+                <a:ea typeface="Times New Roman" pitchFamily="34" charset="-122"/>
+                <a:cs typeface="Times New Roman" pitchFamily="34" charset="-120"/>
+              </a:rPr>
+              <a:t>Lesson 6: The Revolution of the Earth</a:t>
+            </a:r>
+            <a:endParaRPr lang="en-US" sz="4000" dirty="0"/>
+          </a:p>
+        </p:txBody>
+      </p:sp>
+      <p:sp>
+        <p:nvSpPr>
+          <p:cNvPr id="25" name="Slide Number Placeholder 0"/>
+          <p:cNvSpPr>
+            <a:spLocks noGrp="1"/>
+          </p:cNvSpPr>
+          <p:nvPr>
+            <p:ph type="sldNum" sz="quarter" idx="4294967295"/>
+          </p:nvPr>
+        </p:nvSpPr>
+        <p:spPr>
+          <a:xfrm>
+            <a:off x="27432" y="91440"/>
+            <a:ext cx="585216" cy="475488"/>
+          </a:xfrm>
+          <a:prstGeom prst="rect">
+            <a:avLst/>
+          </a:prstGeom>
+          <a:extLst>
+            <a:ext uri="{C572A759-6A51-4108-AA02-DFA0A04FC94B}">
+              <ma14:wrappingTextBoxFlag xmlns:ma14="http://schemas.microsoft.com/office/mac/drawingml/2011/main" val="0"/>
+            </a:ext>
+          </a:extLst>
+        </p:spPr>
+        <p:txBody>
+          <a:bodyPr/>
+          <a:lstStyle>
+            <a:lvl1pPr>
+              <a:defRPr sz="2000">
+                <a:solidFill>
+                  <a:srgbClr val="FFFFFF"/>
+                </a:solidFill>
+                <a:latin typeface="Calibri"/>
+                <a:ea typeface="Calibri"/>
+                <a:cs typeface="Calibri"/>
+              </a:defRPr>
+            </a:lvl1pPr>
+          </a:lstStyle>
+          <a:p>
+            <a:pPr algn="ctr"/>
+            <a:fld id="{F7021451-1387-4CA6-816F-3879F97B5CBC}" type="slidenum">
+              <a:rPr b="1" lang="en-US"/>
+              <a:t>42</a:t>
+            </a:fld>
+            <a:endParaRPr lang="en-US"/>
+          </a:p>
+        </p:txBody>
+      </p:sp>
+    </p:spTree>
+  </p:cSld>
+  <p:clrMapOvr>
+    <a:masterClrMapping/>
+  </p:clrMapOvr>
+</p:sld>
+</file>
+
+<file path=ppt/slides/slide43.xml><?xml version="1.0" encoding="utf-8"?>
+<p:sld xmlns:a="http://schemas.openxmlformats.org/drawingml/2006/main" xmlns:r="http://schemas.openxmlformats.org/officeDocument/2006/relationships" xmlns:p="http://schemas.openxmlformats.org/presentationml/2006/main">
+  <p:cSld name="Slide 43">
+    <p:spTree>
+      <p:nvGrpSpPr>
+        <p:cNvPr id="1" name=""/>
+        <p:cNvGrpSpPr/>
+        <p:nvPr/>
+      </p:nvGrpSpPr>
+      <p:grpSpPr>
+        <a:xfrm>
+          <a:off x="0" y="0"/>
+          <a:ext cx="0" cy="0"/>
+          <a:chOff x="0" y="0"/>
+          <a:chExt cx="0" cy="0"/>
+        </a:xfrm>
+      </p:grpSpPr>
+      <p:sp>
+        <p:nvSpPr>
+          <p:cNvPr id="2" name="Text 0"/>
+          <p:cNvSpPr/>
+          <p:nvPr/>
+        </p:nvSpPr>
+        <p:spPr>
+          <a:xfrm>
+            <a:off x="457200" y="713232"/>
+            <a:ext cx="11368735" cy="274320"/>
+          </a:xfrm>
+          <a:prstGeom prst="rect">
+            <a:avLst/>
+          </a:prstGeom>
+          <a:noFill/>
+          <a:ln/>
+        </p:spPr>
+        <p:txBody>
+          <a:bodyPr wrap="square" lIns="0" tIns="0" rIns="0" bIns="0" rtlCol="0" anchor="ctr"/>
+          <a:lstStyle/>
+          <a:p>
+            <a:pPr algn="r" indent="0" marL="0">
+              <a:buNone/>
+            </a:pPr>
+            <a:r>
+              <a:rPr lang="en-US" sz="1400" b="1" dirty="0">
+                <a:solidFill>
+                  <a:srgbClr val="1C3F6E"/>
+                </a:solidFill>
+                <a:latin typeface="Calibri" pitchFamily="34" charset="0"/>
+                <a:ea typeface="Calibri" pitchFamily="34" charset="-122"/>
+                <a:cs typeface="Calibri" pitchFamily="34" charset="-120"/>
+              </a:rPr>
               <a:t>BILINGUAL GAME</a:t>
             </a:r>
             <a:endParaRPr lang="en-US" sz="1400" dirty="0"/>
@@ -14508,7 +15644,7 @@
       </p:sp>
       <p:graphicFrame>
         <p:nvGraphicFramePr>
-          <p:cNvPr id="41" name="Table 0"/>
+          <p:cNvPr id="44" name="Table 0"/>
           <p:cNvGraphicFramePr>
             <a:graphicFrameLocks noGrp="1"/>
           </p:cNvGraphicFramePr>
@@ -15820,7 +16956,7 @@
             <a:pPr algn="ctr"/>
             <a:fld id="{F7021451-1387-4CA6-816F-3879F97B5CBC}" type="slidenum">
               <a:rPr b="1" lang="en-US"/>
-              <a:t>40</a:t>
+              <a:t>43</a:t>
             </a:fld>
             <a:endParaRPr lang="en-US"/>
           </a:p>
@@ -15834,9 +16970,9 @@
 </p:sld>
 </file>
 
-<file path=ppt/slides/slide41.xml><?xml version="1.0" encoding="utf-8"?>
+<file path=ppt/slides/slide44.xml><?xml version="1.0" encoding="utf-8"?>
 <p:sld xmlns:a="http://schemas.openxmlformats.org/drawingml/2006/main" xmlns:r="http://schemas.openxmlformats.org/officeDocument/2006/relationships" xmlns:p="http://schemas.openxmlformats.org/presentationml/2006/main">
-  <p:cSld name="Slide 41">
+  <p:cSld name="Slide 44">
     <p:spTree>
       <p:nvGrpSpPr>
         <p:cNvPr id="1" name=""/>
@@ -15931,7 +17067,7 @@
       </p:sp>
       <p:graphicFrame>
         <p:nvGraphicFramePr>
-          <p:cNvPr id="42" name="Table 0"/>
+          <p:cNvPr id="45" name="Table 0"/>
           <p:cNvGraphicFramePr>
             <a:graphicFrameLocks noGrp="1"/>
           </p:cNvGraphicFramePr>
@@ -16553,7 +17689,7 @@
             <a:pPr algn="ctr"/>
             <a:fld id="{F7021451-1387-4CA6-816F-3879F97B5CBC}" type="slidenum">
               <a:rPr b="1" lang="en-US"/>
-              <a:t>41</a:t>
+              <a:t>44</a:t>
             </a:fld>
             <a:endParaRPr lang="en-US"/>
           </a:p>
@@ -16567,9 +17703,9 @@
 </p:sld>
 </file>
 
-<file path=ppt/slides/slide42.xml><?xml version="1.0" encoding="utf-8"?>
+<file path=ppt/slides/slide45.xml><?xml version="1.0" encoding="utf-8"?>
 <p:sld xmlns:a="http://schemas.openxmlformats.org/drawingml/2006/main" xmlns:r="http://schemas.openxmlformats.org/officeDocument/2006/relationships" xmlns:p="http://schemas.openxmlformats.org/presentationml/2006/main">
-  <p:cSld name="Slide 42">
+  <p:cSld name="Slide 45">
     <p:spTree>
       <p:nvGrpSpPr>
         <p:cNvPr id="1" name=""/>
@@ -16664,7 +17800,7 @@
       </p:sp>
       <p:graphicFrame>
         <p:nvGraphicFramePr>
-          <p:cNvPr id="43" name="Table 0"/>
+          <p:cNvPr id="46" name="Table 0"/>
           <p:cNvGraphicFramePr>
             <a:graphicFrameLocks noGrp="1"/>
           </p:cNvGraphicFramePr>
@@ -16774,7 +17910,7 @@
                           <a:ea typeface="Calibri" pitchFamily="34" charset="-122"/>
                           <a:cs typeface="Calibri" pitchFamily="34" charset="-120"/>
                         </a:rPr>
-                        <a:t>Meaning of Rotation; Effects of Rotation.</a:t>
+                        <a:t>DEFINITIONS; Meaning and Illustration of Rotation; Effects of Rotation.</a:t>
                       </a:r>
                       <a:endParaRPr lang="en-US" sz="1600" dirty="0">
                         <a:latin typeface="Calibri" charset="0"/>
@@ -17424,7 +18560,7 @@
             <a:pPr algn="ctr"/>
             <a:fld id="{F7021451-1387-4CA6-816F-3879F97B5CBC}" type="slidenum">
               <a:rPr b="1" lang="en-US"/>
-              <a:t>42</a:t>
+              <a:t>45</a:t>
             </a:fld>
             <a:endParaRPr lang="en-US"/>
           </a:p>
@@ -17438,9 +18574,9 @@
 </p:sld>
 </file>
 
-<file path=ppt/slides/slide43.xml><?xml version="1.0" encoding="utf-8"?>
+<file path=ppt/slides/slide46.xml><?xml version="1.0" encoding="utf-8"?>
 <p:sld xmlns:a="http://schemas.openxmlformats.org/drawingml/2006/main" xmlns:r="http://schemas.openxmlformats.org/officeDocument/2006/relationships" xmlns:p="http://schemas.openxmlformats.org/presentationml/2006/main">
-  <p:cSld name="Slide 43">
+  <p:cSld name="Slide 46">
     <p:spTree>
       <p:nvGrpSpPr>
         <p:cNvPr id="1" name=""/>
@@ -17617,7 +18753,7 @@
                 <a:ea typeface="Calibri" pitchFamily="34" charset="-122"/>
                 <a:cs typeface="Calibri" pitchFamily="34" charset="-120"/>
               </a:rPr>
-              <a:t>Activity 1 is an animation (GIF): it plays automatically in slide-show mode.</a:t>
+              <a:t>Activities 1 and 3 are animations (GIF): it plays automatically in slide-show mode.</a:t>
             </a:r>
             <a:endParaRPr lang="en-US" sz="2000" dirty="0"/>
           </a:p>
@@ -17638,7 +18774,7 @@
                 <a:ea typeface="Calibri" pitchFamily="34" charset="-122"/>
                 <a:cs typeface="Calibri" pitchFamily="34" charset="-120"/>
               </a:rPr>
-              <a:t>Without the projector (Activity 1): turn a ball in front of a torch with a mark on it.</a:t>
+              <a:t>Without the projector (Activity 1): turn a ball with a mark on it in front of a torch.</a:t>
             </a:r>
             <a:endParaRPr lang="en-US" sz="2000" dirty="0"/>
           </a:p>
@@ -17680,7 +18816,7 @@
                 <a:ea typeface="Calibri" pitchFamily="34" charset="-122"/>
                 <a:cs typeface="Calibri" pitchFamily="34" charset="-120"/>
               </a:rPr>
-              <a:t>Without the projector (Activity 3): describe water turning when it goes down a sink.</a:t>
+              <a:t>Without the projector (Activity 3): draw a curved arrow on a circle.</a:t>
             </a:r>
             <a:endParaRPr lang="en-US" sz="2000" dirty="0"/>
           </a:p>
@@ -17728,7 +18864,7 @@
             <a:pPr algn="ctr"/>
             <a:fld id="{F7021451-1387-4CA6-816F-3879F97B5CBC}" type="slidenum">
               <a:rPr b="1" lang="en-US"/>
-              <a:t>43</a:t>
+              <a:t>46</a:t>
             </a:fld>
             <a:endParaRPr lang="en-US"/>
           </a:p>
@@ -17742,9 +18878,9 @@
 </p:sld>
 </file>
 
-<file path=ppt/slides/slide44.xml><?xml version="1.0" encoding="utf-8"?>
+<file path=ppt/slides/slide47.xml><?xml version="1.0" encoding="utf-8"?>
 <p:sld xmlns:a="http://schemas.openxmlformats.org/drawingml/2006/main" xmlns:r="http://schemas.openxmlformats.org/officeDocument/2006/relationships" xmlns:p="http://schemas.openxmlformats.org/presentationml/2006/main">
-  <p:cSld name="Slide 44">
+  <p:cSld name="Slide 47">
     <p:spTree>
       <p:nvGrpSpPr>
         <p:cNvPr id="1" name=""/>
@@ -17963,27 +19099,6 @@
                 <a:ea typeface="Calibri" pitchFamily="34" charset="-122"/>
                 <a:cs typeface="Calibri" pitchFamily="34" charset="-120"/>
               </a:rPr>
-              <a:t>Photo, Activity 3: “NASA's Aqua Satellite Captures Hurricane Danielle” by NASA Goddard Photo and Video, CC BY 2.0, via nasa (https://www.flickr.com/photos/24662369@N07/4931591817)</a:t>
-            </a:r>
-            <a:endParaRPr lang="en-US" sz="1800" dirty="0"/>
-          </a:p>
-          <a:p>
-            <a:pPr algn="l" marL="342900" indent="-342900">
-              <a:spcAft>
-                <a:spcPts val="800"/>
-              </a:spcAft>
-              <a:buSzPct val="100000"/>
-              <a:buChar char="•"/>
-            </a:pPr>
-            <a:r>
-              <a:rPr lang="en-US" sz="1800" dirty="0">
-                <a:solidFill>
-                  <a:srgbClr val="111111"/>
-                </a:solidFill>
-                <a:latin typeface="Calibri" pitchFamily="34" charset="0"/>
-                <a:ea typeface="Calibri" pitchFamily="34" charset="-122"/>
-                <a:cs typeface="Calibri" pitchFamily="34" charset="-120"/>
-              </a:rPr>
               <a:t>Diagrams and animations: drawn for this lesson (Geography Department).</a:t>
             </a:r>
             <a:endParaRPr lang="en-US" sz="1800" dirty="0"/>
@@ -18032,7 +19147,7 @@
             <a:pPr algn="ctr"/>
             <a:fld id="{F7021451-1387-4CA6-816F-3879F97B5CBC}" type="slidenum">
               <a:rPr b="1" lang="en-US"/>
-              <a:t>44</a:t>
+              <a:t>47</a:t>
             </a:fld>
             <a:endParaRPr lang="en-US"/>
           </a:p>
@@ -19216,7 +20331,7 @@
         <p:spPr>
           <a:xfrm>
             <a:off x="0" y="658368"/>
-            <a:ext cx="5120640" cy="5833872"/>
+            <a:ext cx="2468880" cy="5833872"/>
           </a:xfrm>
           <a:prstGeom prst="rect">
             <a:avLst/>
@@ -19231,8 +20346,8 @@
         </p:nvSpPr>
         <p:spPr>
           <a:xfrm>
-            <a:off x="5349240" y="1005840"/>
-            <a:ext cx="6522415" cy="731520"/>
+            <a:off x="2697480" y="1005840"/>
+            <a:ext cx="9174175" cy="731520"/>
           </a:xfrm>
           <a:prstGeom prst="rect">
             <a:avLst/>
@@ -19272,8 +20387,8 @@
         </p:nvSpPr>
         <p:spPr>
           <a:xfrm>
-            <a:off x="5349240" y="1783080"/>
-            <a:ext cx="6522415" cy="4663440"/>
+            <a:off x="2697480" y="1783080"/>
+            <a:ext cx="9174175" cy="4663440"/>
           </a:xfrm>
           <a:prstGeom prst="rect">
             <a:avLst/>
@@ -19300,7 +20415,7 @@
                 <a:ea typeface="Times New Roman" pitchFamily="34" charset="-122"/>
                 <a:cs typeface="Times New Roman" pitchFamily="34" charset="-120"/>
               </a:rPr>
-              <a:t>Every morning in Garoua, the first light appears in the east. In the evening, the Sun disappears in the west. Oumarou's little sister thinks that the Sun walks around the Earth.</a:t>
+              <a:t>Every morning in Garoua, the first light appears in the east, and in the evening the Sun disappears in the west. Oumarou's little sister thinks that the Sun walks around the Earth every day. She asks: "What really moves, and why do we have day and night?"</a:t>
             </a:r>
             <a:endParaRPr lang="en-US" sz="4000" dirty="0"/>
           </a:p>

--- a/lecons/F3/08_FORM4_LESSON05_Rotation_of_the_Earth.pptx
+++ b/lecons/F3/08_FORM4_LESSON05_Rotation_of_the_Earth.pptx
@@ -3452,7 +3452,7 @@
           <a:p>
             <a:r>
               <a:rPr lang="en-US" dirty="0"/>
-              <a:t>Before we start the new lesson, let us correct the homework I gave you at the end of Practical Work 2: Calculation of Time and Date. The question was: Watch the sunrise and the sunset one day this week and write down the times. Write a sentence to explain why the Sun rises in the east. Take out your exercise books.</a:t>
+              <a:t>Before we start the new lesson, let us correct the homework I gave you at the end of Practical Work 2: Calculation of Time and Date. The question was: Define the rotation of the Earth. Take out your exercise books.</a:t>
             </a:r>
             <a:endParaRPr lang="en-US" dirty="0"/>
           </a:p>
@@ -3628,7 +3628,7 @@
           <a:p>
             <a:r>
               <a:rPr lang="en-US" dirty="0"/>
-              <a:t>For your homework: Ask an elder in which months the rainy season and the dry season start in Garoua. Write the months down. We shall correct it at the beginning of our next lesson.</a:t>
+              <a:t>For your homework: State how long the Earth takes to go around the Sun. We shall correct it at the beginning of our next lesson.</a:t>
             </a:r>
             <a:endParaRPr lang="en-US" dirty="0"/>
           </a:p>
@@ -4244,7 +4244,7 @@
           <a:p>
             <a:r>
               <a:rPr lang="en-US" dirty="0"/>
-              <a:t>Here is a good answer. Example: sunrise about 6:00 and sunset about 18:15 in Garoua. The Sun rises in the east because the Earth turns from west to east. Compare it with your own answer and correct your work in red.</a:t>
+              <a:t>Here is a good answer. It is the turning of the Earth on its axis from west to east. Compare it with your own answer and correct your work in red.</a:t>
             </a:r>
             <a:endParaRPr lang="en-US" dirty="0"/>
           </a:p>
@@ -14638,7 +14638,7 @@
         <p:spPr>
           <a:xfrm>
             <a:off x="0" y="658368"/>
-            <a:ext cx="3840480" cy="5833872"/>
+            <a:ext cx="5120640" cy="5833872"/>
           </a:xfrm>
           <a:prstGeom prst="rect">
             <a:avLst/>
@@ -14653,8 +14653,8 @@
         </p:nvSpPr>
         <p:spPr>
           <a:xfrm>
-            <a:off x="4069080" y="1005840"/>
-            <a:ext cx="7802575" cy="731520"/>
+            <a:off x="5349240" y="1005840"/>
+            <a:ext cx="6522415" cy="731520"/>
           </a:xfrm>
           <a:prstGeom prst="rect">
             <a:avLst/>
@@ -14694,8 +14694,8 @@
         </p:nvSpPr>
         <p:spPr>
           <a:xfrm>
-            <a:off x="4069080" y="1783080"/>
-            <a:ext cx="7802575" cy="4663440"/>
+            <a:off x="5349240" y="1783080"/>
+            <a:ext cx="6522415" cy="4663440"/>
           </a:xfrm>
           <a:prstGeom prst="rect">
             <a:avLst/>
@@ -14742,7 +14742,7 @@
                 <a:ea typeface="Times New Roman" pitchFamily="34" charset="-122"/>
                 <a:cs typeface="Times New Roman" pitchFamily="34" charset="-120"/>
               </a:rPr>
-              <a:t>Watch the sunrise and the sunset one day this week and write down the times. Write a sentence to explain why the Sun rises in the east.</a:t>
+              <a:t>Define the rotation of the Earth.</a:t>
             </a:r>
             <a:endParaRPr lang="en-US" sz="4000" dirty="0"/>
           </a:p>
@@ -15246,7 +15246,7 @@
                 <a:ea typeface="Times New Roman" pitchFamily="34" charset="-122"/>
                 <a:cs typeface="Times New Roman" pitchFamily="34" charset="-120"/>
               </a:rPr>
-              <a:t>Ask an elder in which months the rainy season and the dry season start in Garoua. Write the months down.</a:t>
+              <a:t>State how long the Earth takes to go around the Sun.</a:t>
             </a:r>
             <a:endParaRPr lang="en-US" sz="4000" dirty="0"/>
           </a:p>
@@ -18186,7 +18186,7 @@
                           <a:ea typeface="Calibri" pitchFamily="34" charset="-122"/>
                           <a:cs typeface="Calibri" pitchFamily="34" charset="-120"/>
                         </a:rPr>
-                        <a:t>Ask an elder in which months the rainy season and the dry season start in Garoua. Write the months down.</a:t>
+                        <a:t>State how long the Earth takes to go around the Sun.</a:t>
                       </a:r>
                       <a:endParaRPr lang="en-US" sz="1600" dirty="0">
                         <a:latin typeface="Calibri" charset="0"/>
@@ -19318,7 +19318,7 @@
                 <a:ea typeface="Times New Roman" pitchFamily="34" charset="-122"/>
                 <a:cs typeface="Times New Roman" pitchFamily="34" charset="-120"/>
               </a:rPr>
-              <a:t>Example: sunrise about 6:00 and sunset about 18:15 in Garoua. The Sun rises in the east because the Earth turns from west to east.</a:t>
+              <a:t>It is the turning of the Earth on its axis from west to east.</a:t>
             </a:r>
             <a:endParaRPr lang="en-US" sz="4000" dirty="0"/>
           </a:p>
